--- a/AI-tools/AI-Talk-LessTechnical/AI-1-Evolution.pptx
+++ b/AI-tools/AI-Talk-LessTechnical/AI-1-Evolution.pptx
@@ -13,8 +13,8 @@
   <p:sldIdLst>
     <p:sldId id="276" r:id="rId2"/>
     <p:sldId id="257" r:id="rId3"/>
-    <p:sldId id="275" r:id="rId4"/>
-    <p:sldId id="278" r:id="rId5"/>
+    <p:sldId id="278" r:id="rId4"/>
+    <p:sldId id="286" r:id="rId5"/>
     <p:sldId id="279" r:id="rId6"/>
     <p:sldId id="280" r:id="rId7"/>
     <p:sldId id="281" r:id="rId8"/>
@@ -225,7 +225,7 @@
           <a:p>
             <a:fld id="{7BAEECA8-D063-486F-AE31-5020270C1449}" type="datetimeFigureOut">
               <a:rPr lang="en-US" smtClean="0"/>
-              <a:t>4/30/2026</a:t>
+              <a:t>5/28/2026</a:t>
             </a:fld>
             <a:endParaRPr lang="en-US"/>
           </a:p>
@@ -800,6 +800,230 @@
 </inkml:ink>
 </file>
 
+<file path=ppt/ink/ink23.xml><?xml version="1.0" encoding="utf-8"?>
+<inkml:ink xmlns:inkml="http://www.w3.org/2003/InkML">
+  <inkml:definitions>
+    <inkml:context xml:id="ctx0">
+      <inkml:inkSource xml:id="inkSrc0">
+        <inkml:traceFormat>
+          <inkml:channel name="X" type="integer" min="-2.14748E9" max="2.14748E9" units="cm"/>
+          <inkml:channel name="Y" type="integer" min="-2.14748E9" max="2.14748E9" units="cm"/>
+          <inkml:channel name="F" type="integer" max="32767" units="dev"/>
+          <inkml:channel name="OA" type="integer" max="360" units="deg"/>
+          <inkml:channel name="OE" type="integer" max="90" units="deg"/>
+        </inkml:traceFormat>
+        <inkml:channelProperties>
+          <inkml:channelProperty channel="X" name="resolution" value="1000" units="1/cm"/>
+          <inkml:channelProperty channel="Y" name="resolution" value="1000" units="1/cm"/>
+          <inkml:channelProperty channel="F" name="resolution" value="0" units="1/dev"/>
+          <inkml:channelProperty channel="OA" name="resolution" value="1000" units="1/deg"/>
+          <inkml:channelProperty channel="OE" name="resolution" value="1000" units="1/deg"/>
+        </inkml:channelProperties>
+      </inkml:inkSource>
+      <inkml:timestamp xml:id="ts0" timeString="2026-05-19T06:25:01.458"/>
+    </inkml:context>
+    <inkml:brush xml:id="br0">
+      <inkml:brushProperty name="width" value="0.1" units="cm"/>
+      <inkml:brushProperty name="height" value="0.1" units="cm"/>
+      <inkml:brushProperty name="color" value="#FFC114"/>
+    </inkml:brush>
+  </inkml:definitions>
+  <inkml:trace contextRef="#ctx0" brushRef="#br0">2669 46 5781 0 0,'2'-2'-25'0'0,"1"0"0"0"0,0 0 0 0 0,-1-1 1 0 0,0 1-1 0 0,1-1 0 0 0,-1 1 0 0 0,0-1 1 0 0,-1 0-1 0 0,1 0 0 0 0,0 0 1 0 0,1-6 1564 0 0,-7 5-1399 0 0,4 4-121 0 0,0 0-1 0 0,0-1 1 0 0,0 1 0 0 0,-1 0-1 0 0,1 0 1 0 0,0-1 0 0 0,0 1-1 0 0,0 0 1 0 0,0 0 0 0 0,-1-1-1 0 0,1 1 1 0 0,0 0 0 0 0,0 0-1 0 0,-1-1 1 0 0,1 1 0 0 0,0 0-1 0 0,0 0 1 0 0,-1 0 0 0 0,1 0-1 0 0,0 0 1 0 0,-1-1 0 0 0,1 1-1 0 0,0 0 1 0 0,-1 0 0 0 0,1 0-1 0 0,0 0 1 0 0,0 0 0 0 0,-1 0-1 0 0,1 0 1 0 0,0 0 0 0 0,-1 0-1 0 0,1 0 1 0 0,0 0 0 0 0,-1 0-1 0 0,1 0 1 0 0,0 0 0 0 0,-1 1-1 0 0,1-1 1 0 0,0 0 0 0 0,0 0-1 0 0,-1 0 1 0 0,1 0 0 0 0,-1 1-1 0 0,-73 42 199 0 0,1 3 0 0 0,2 4 0 0 0,-64 59-1 0 0,17-16 43 0 0,-23 22 182 0 0,-114 81 346 0 0,41-41-390 0 0,-66 55-28 0 0,153-115-253 0 0,-121 82 62 0 0,7 6-73 0 0,189-139-86 0 0,-90 81 15 0 0,-35 26 16 0 0,155-132-42 0 0,16-13-3 0 0,-1 0 0 0 0,0 0-1 0 0,0-1 1 0 0,-13 7 0 0 0,10-3 16 0 0,0 1-71 0 0,10-10 68 0 0,0-1 0 0 0,0 1 0 0 0,0 0 0 0 0,1 0 0 0 0,-1 0 1 0 0,0 0-1 0 0,0 0 0 0 0,0 0 0 0 0,0 0 0 0 0,0 0 0 0 0,0-1 1 0 0,0 1-1 0 0,0 0 0 0 0,0 0 0 0 0,0 0 0 0 0,0 0 0 0 0,0 0 1 0 0,0 0-1 0 0,0-1 0 0 0,0 1 0 0 0,0 0 0 0 0,0 0 0 0 0,0 0 1 0 0,0 0-1 0 0,0 0 0 0 0,0 0 0 0 0,0-1 0 0 0,0 1 0 0 0,0 0 1 0 0,0 0-1 0 0,0 0 0 0 0,0 0 0 0 0,-1 0 0 0 0,1 0 0 0 0,0 0 1 0 0,0 0-1 0 0,0-1 0 0 0,0 1 0 0 0,0 0 0 0 0,0 0 0 0 0,0 0 0 0 0,0 0 1 0 0,0 0-1 0 0,-1 0 0 0 0,1 0 0 0 0,0 0 0 0 0,0 0 0 0 0,0 0 1 0 0,0 0-1 0 0,0 0 0 0 0,0 0 0 0 0,0 0 0 0 0,-1 0 0 0 0,1 0 1 0 0,0 0-1 0 0,0 0 0 0 0,0 0 0 0 0,0 0 0 0 0,0 0 0 0 0,0 0 1 0 0,-1 0-1 0 0,1 0 0 0 0,8-32 25 0 0,2 1 0 0 0,1 0 0 0 0,1 1 1 0 0,19-33-1 0 0,76-121-57 0 0,-69 123 37 0 0,-18 27-11 0 0,-6 10-68 0 0,26-36 0 0 0,-39 58 33 0 0,-6 9-19 0 0,-311 443 55 0 0,152-204 26 0 0,155-233-40 0 0,4-8-4 0 0,1 0-1 0 0,0 1 0 0 0,0 0 1 0 0,0 0-1 0 0,1 0 1 0 0,0 1-1 0 0,0-1 1 0 0,0 1-1 0 0,-2 11 1 0 0,11-18 28 0 0,27-3-20 0 0,0-2 1 0 0,0-1 0 0 0,-1-2 0 0 0,60-22 0 0 0,-7 3 35 0 0,-44 16-15 0 0,40-12-52 0 0,135-22 0 0 0,-212 45 4 0 0,40-13-4491 0 0,6-24 341 0 0,-10 8 1689 0 0</inkml:trace>
+</inkml:ink>
+</file>
+
+<file path=ppt/ink/ink24.xml><?xml version="1.0" encoding="utf-8"?>
+<inkml:ink xmlns:inkml="http://www.w3.org/2003/InkML">
+  <inkml:definitions>
+    <inkml:context xml:id="ctx0">
+      <inkml:inkSource xml:id="inkSrc0">
+        <inkml:traceFormat>
+          <inkml:channel name="X" type="integer" min="-2.14748E9" max="2.14748E9" units="cm"/>
+          <inkml:channel name="Y" type="integer" min="-2.14748E9" max="2.14748E9" units="cm"/>
+          <inkml:channel name="F" type="integer" max="32767" units="dev"/>
+          <inkml:channel name="OA" type="integer" max="360" units="deg"/>
+          <inkml:channel name="OE" type="integer" max="90" units="deg"/>
+        </inkml:traceFormat>
+        <inkml:channelProperties>
+          <inkml:channelProperty channel="X" name="resolution" value="1000" units="1/cm"/>
+          <inkml:channelProperty channel="Y" name="resolution" value="1000" units="1/cm"/>
+          <inkml:channelProperty channel="F" name="resolution" value="0" units="1/dev"/>
+          <inkml:channelProperty channel="OA" name="resolution" value="1000" units="1/deg"/>
+          <inkml:channelProperty channel="OE" name="resolution" value="1000" units="1/deg"/>
+        </inkml:channelProperties>
+      </inkml:inkSource>
+      <inkml:timestamp xml:id="ts0" timeString="2026-05-19T06:25:04.021"/>
+    </inkml:context>
+    <inkml:brush xml:id="br0">
+      <inkml:brushProperty name="width" value="0.1" units="cm"/>
+      <inkml:brushProperty name="height" value="0.1" units="cm"/>
+      <inkml:brushProperty name="color" value="#FFC114"/>
+    </inkml:brush>
+  </inkml:definitions>
+  <inkml:trace contextRef="#ctx0" brushRef="#br0">72 13 5933 0 0,'-42'-10'472'0'0,"40"10"201"0"0,-21-3 821 0 0,23 3-1484 0 0,0 0 0 0 0,-1 0 0 0 0,1 0-1 0 0,0 1 1 0 0,0-1 0 0 0,0 0 0 0 0,-1 0-1 0 0,1 0 1 0 0,0 0 0 0 0,0 0 0 0 0,0 0-1 0 0,0 0 1 0 0,-1 0 0 0 0,1 1 0 0 0,0-1-1 0 0,0 0 1 0 0,0 0 0 0 0,0 0 0 0 0,0 0 0 0 0,0 0-1 0 0,-1 1 1 0 0,1-1 0 0 0,0 0 0 0 0,0 0-1 0 0,0 0 1 0 0,0 0 0 0 0,0 1 0 0 0,0-1-1 0 0,0 0 1 0 0,0 0 0 0 0,0 0 0 0 0,0 1-1 0 0,0-1 1 0 0,0 0 0 0 0,0 0 0 0 0,0 0 0 0 0,0 1-1 0 0,0-1 1 0 0,0 0 0 0 0,0 0 0 0 0,0 0-1 0 0,0 1 1 0 0,0-1 0 0 0,0 0 0 0 0,1 0-1 0 0,-1 1 1 0 0,27 29-478 0 0,-4-5 599 0 0,25 42-119 0 0,4-2 1 0 0,2-3-1 0 0,2-2 0 0 0,105 86 0 0 0,44 21 54 0 0,224 219 66 0 0,-344-292-111 0 0,35 34 43 0 0,-73-82-21 0 0,66 86 0 0 0,-67-76-30 0 0,3-3 11 0 0,2-2 0 0 0,71 53-1 0 0,-13-10 2 0 0,-68-61-9 0 0,0-2 0 0 0,61 34 0 0 0,62 44 38 0 0,-91-57-25 0 0,-45-30-5 0 0,9 8 341 0 0,-37-30-341 0 0,0-1 0 0 0,0 1 0 0 0,0 0 0 0 0,0 0 0 0 0,0 0 0 0 0,0 0-1 0 0,0 0 1 0 0,0-1 0 0 0,0 1 0 0 0,0 0 0 0 0,0 0 0 0 0,0 0 0 0 0,0 0 0 0 0,0 0 0 0 0,0-1 0 0 0,0 1 0 0 0,1 0 0 0 0,-1 0 0 0 0,0 0 0 0 0,0 0 0 0 0,0 0 0 0 0,0 0 0 0 0,0 0 0 0 0,0-1 0 0 0,0 1 0 0 0,0 0 0 0 0,0 0 0 0 0,1 0 0 0 0,-1 0 0 0 0,0 0 0 0 0,0 0 0 0 0,0 0 0 0 0,0 0 0 0 0,0 0 0 0 0,1 0 0 0 0,-1 0 0 0 0,0 0 0 0 0,0 0 0 0 0,0 0 0 0 0,0 0 0 0 0,0 0 0 0 0,0 0 0 0 0,1 0 0 0 0,-1 0 0 0 0,0 0 0 0 0,0 0 0 0 0,0 0 0 0 0,0 0 0 0 0,0 0 0 0 0,1 0 0 0 0,-1 0 0 0 0,0 0 0 0 0,-30-45 1947 0 0,24 37-2385 0 0,-152-240 1197 0 0,88 157-504 0 0,69 90-271 0 0,-9-11-426 0 0,16 31 400 0 0,1 0 0 0 0,1-1 0 0 0,1 1 0 0 0,1-2 0 0 0,0 1 0 0 0,17 21 0 0 0,88 94 12 0 0,-21-26 48 0 0,-93-106-35 0 0,0 0 0 0 0,0 1 0 0 0,0-1 0 0 0,0 0 1 0 0,0 0-1 0 0,0 0 0 0 0,-1 1 0 0 0,1-1 1 0 0,0 0-1 0 0,-1 1 0 0 0,1-1 0 0 0,-1 0 1 0 0,0 1-1 0 0,1-1 0 0 0,-1 1 0 0 0,0-1 1 0 0,0 1-1 0 0,0-1 0 0 0,0 0 0 0 0,0 1 0 0 0,0-1 1 0 0,0 1-1 0 0,-1-1 0 0 0,1 1 0 0 0,-1 1 1 0 0,0-1-1 0 0,-1 0 1 0 0,1 0 0 0 0,-1 0 0 0 0,0-1-1 0 0,0 1 1 0 0,0 0 0 0 0,1-1 0 0 0,-1 1-1 0 0,-1-1 1 0 0,1 0 0 0 0,0 0 0 0 0,0 0-1 0 0,0 0 1 0 0,-3 1 0 0 0,-13 3 18 0 0,0 0 0 0 0,0-1 0 0 0,-26 2 0 0 0,26-4-8 0 0,-288 27 133 0 0,43-6 93 0 0,184-20-2467 0 0,76-3 901 0 0</inkml:trace>
+</inkml:ink>
+</file>
+
+<file path=ppt/ink/ink25.xml><?xml version="1.0" encoding="utf-8"?>
+<inkml:ink xmlns:inkml="http://www.w3.org/2003/InkML">
+  <inkml:definitions>
+    <inkml:context xml:id="ctx0">
+      <inkml:inkSource xml:id="inkSrc0">
+        <inkml:traceFormat>
+          <inkml:channel name="X" type="integer" min="-2.14748E9" max="2.14748E9" units="cm"/>
+          <inkml:channel name="Y" type="integer" min="-2.14748E9" max="2.14748E9" units="cm"/>
+          <inkml:channel name="F" type="integer" max="32767" units="dev"/>
+          <inkml:channel name="OA" type="integer" max="360" units="deg"/>
+          <inkml:channel name="OE" type="integer" max="90" units="deg"/>
+        </inkml:traceFormat>
+        <inkml:channelProperties>
+          <inkml:channelProperty channel="X" name="resolution" value="1000" units="1/cm"/>
+          <inkml:channelProperty channel="Y" name="resolution" value="1000" units="1/cm"/>
+          <inkml:channelProperty channel="F" name="resolution" value="0" units="1/dev"/>
+          <inkml:channelProperty channel="OA" name="resolution" value="1000" units="1/deg"/>
+          <inkml:channelProperty channel="OE" name="resolution" value="1000" units="1/deg"/>
+        </inkml:channelProperties>
+      </inkml:inkSource>
+      <inkml:timestamp xml:id="ts0" timeString="2026-05-19T06:25:05.650"/>
+    </inkml:context>
+    <inkml:brush xml:id="br0">
+      <inkml:brushProperty name="width" value="0.1" units="cm"/>
+      <inkml:brushProperty name="height" value="0.1" units="cm"/>
+      <inkml:brushProperty name="color" value="#FFC114"/>
+    </inkml:brush>
+  </inkml:definitions>
+  <inkml:trace contextRef="#ctx0" brushRef="#br0">1052 98 5733 0 0,'19'-32'-687'0'0,"-17"27"757"0"0,1 0 0 0 0,-1 0 0 0 0,1 1 0 0 0,0-1 0 0 0,0 1 0 0 0,5-7 0 0 0,-7 10 36 0 0,-1 0 1 0 0,1 0-1 0 0,-1 0 1 0 0,1 0-1 0 0,-1-1 1 0 0,0 1-1 0 0,0 0 1 0 0,0 0 0 0 0,0 0-1 0 0,0-1 1 0 0,0 1-1 0 0,0 0 1 0 0,0 0-1 0 0,0 0 1 0 0,0-1-1 0 0,-1 1 1 0 0,1 0-1 0 0,0 0 1 0 0,-1 0-1 0 0,-1-2 1 0 0,-31 34-38 0 0,1 3 1 0 0,1 0-1 0 0,-45 68 1 0 0,-26 31-16 0 0,-498 470 524 0 0,500-519 1469 0 0,84-98-1839 0 0,15 10-192 0 0,0 0 0 0 0,0 1 0 0 0,1-1-1 0 0,-1 0 1 0 0,1 1 0 0 0,0-1-1 0 0,0 0 1 0 0,0 0 0 0 0,1 1 0 0 0,-1-1-1 0 0,1 0 1 0 0,0 1 0 0 0,0-1-1 0 0,0 1 1 0 0,3-6 0 0 0,-3 7-8 0 0,22-61 39 0 0,2 1 0 0 0,43-73 0 0 0,-66 133-65 0 0,1-3 6 0 0,-25 59 22 0 0,12-28-13 0 0,-19 39 12 0 0,-40 63 0 0 0,-17 37 23 0 0,79-154-34 0 0,7-11 0 0 0,-1 1 0 0 0,0 0 0 0 0,0 0-1 0 0,1 0 1 0 0,-1 0 0 0 0,1 0 0 0 0,-1 0 0 0 0,1 0 0 0 0,-1 1 0 0 0,1-1-1 0 0,0 0 1 0 0,-1 0 0 0 0,1 0 0 0 0,0 0 0 0 0,0 1 0 0 0,0-1 0 0 0,0 0 0 0 0,0 0-1 0 0,0 0 1 0 0,0 0 0 0 0,1 2 0 0 0,27-5-2 0 0,180-44 18 0 0,24-3-16 0 0,-184 40-37 0 0,-32 5-148 0 0,1 1-1 0 0,-1 1 1 0 0,1 0 0 0 0,-1 1 0 0 0,1 1 0 0 0,33 3 0 0 0,-49-3 58 0 0,0 0-1 0 0,0 0 1 0 0,0 0-1 0 0,0 1 1 0 0,0-1-1 0 0,-1 0 1 0 0,1 0-1 0 0,0 0 1 0 0,0 1-1 0 0,0-1 0 0 0,0 1 1 0 0,0-1-1 0 0,0 1 1 0 0,0-1-1 0 0,-1 1 1 0 0,1-1-1 0 0,0 1 1 0 0,0 0-1 0 0,-1-1 1 0 0,1 1-1 0 0,0 0 1 0 0,-1 0-1 0 0,1-1 1 0 0,-1 1-1 0 0,1 0 1 0 0,-1 0-1 0 0,1 0 0 0 0,-1 0 1 0 0,1 0-1 0 0,-1 0 1 0 0,0 0-1 0 0,0-1 1 0 0,0 1-1 0 0,1 0 1 0 0,-1 0-1 0 0,0 0 1 0 0,0 0-1 0 0,0 0 1 0 0,0 0-1 0 0,-1 0 1 0 0,1 0-1 0 0,0 0 1 0 0,-1 1-1 0 0,-6 12-2291 0 0</inkml:trace>
+</inkml:ink>
+</file>
+
+<file path=ppt/ink/ink26.xml><?xml version="1.0" encoding="utf-8"?>
+<inkml:ink xmlns:inkml="http://www.w3.org/2003/InkML">
+  <inkml:definitions>
+    <inkml:context xml:id="ctx0">
+      <inkml:inkSource xml:id="inkSrc0">
+        <inkml:traceFormat>
+          <inkml:channel name="X" type="integer" min="-2.14748E9" max="2.14748E9" units="cm"/>
+          <inkml:channel name="Y" type="integer" min="-2.14748E9" max="2.14748E9" units="cm"/>
+          <inkml:channel name="F" type="integer" max="32767" units="dev"/>
+          <inkml:channel name="OA" type="integer" max="360" units="deg"/>
+          <inkml:channel name="OE" type="integer" max="90" units="deg"/>
+        </inkml:traceFormat>
+        <inkml:channelProperties>
+          <inkml:channelProperty channel="X" name="resolution" value="1000" units="1/cm"/>
+          <inkml:channelProperty channel="Y" name="resolution" value="1000" units="1/cm"/>
+          <inkml:channelProperty channel="F" name="resolution" value="0" units="1/dev"/>
+          <inkml:channelProperty channel="OA" name="resolution" value="1000" units="1/deg"/>
+          <inkml:channelProperty channel="OE" name="resolution" value="1000" units="1/deg"/>
+        </inkml:channelProperties>
+      </inkml:inkSource>
+      <inkml:timestamp xml:id="ts0" timeString="2026-05-19T06:25:06.710"/>
+    </inkml:context>
+    <inkml:brush xml:id="br0">
+      <inkml:brushProperty name="width" value="0.1" units="cm"/>
+      <inkml:brushProperty name="height" value="0.1" units="cm"/>
+      <inkml:brushProperty name="color" value="#FFC114"/>
+    </inkml:brush>
+  </inkml:definitions>
+  <inkml:trace contextRef="#ctx0" brushRef="#br0">30 159 5625 0 0,'-13'-135'74'0'0,"13"134"2"0"0,-5-13 132 0 0,-2 5-42 0 0,4 36-148 0 0,1 0-1 0 0,2 0 1 0 0,1 0 0 0 0,4 28 0 0 0,1 13 25 0 0,-6-53-25 0 0,16 457 662 0 0,-16-456-128 0 0,-1-1 1 0 0,0 0 0 0 0,0 1 0 0 0,-2-1-1 0 0,-5 19 1 0 0,8-33-140 0 0,-4 5-172 0 0,0-29-6618 0 0</inkml:trace>
+</inkml:ink>
+</file>
+
+<file path=ppt/ink/ink27.xml><?xml version="1.0" encoding="utf-8"?>
+<inkml:ink xmlns:inkml="http://www.w3.org/2003/InkML">
+  <inkml:definitions>
+    <inkml:context xml:id="ctx0">
+      <inkml:inkSource xml:id="inkSrc0">
+        <inkml:traceFormat>
+          <inkml:channel name="X" type="integer" min="-2.14748E9" max="2.14748E9" units="cm"/>
+          <inkml:channel name="Y" type="integer" min="-2.14748E9" max="2.14748E9" units="cm"/>
+          <inkml:channel name="F" type="integer" max="32767" units="dev"/>
+          <inkml:channel name="OA" type="integer" max="360" units="deg"/>
+          <inkml:channel name="OE" type="integer" max="90" units="deg"/>
+        </inkml:traceFormat>
+        <inkml:channelProperties>
+          <inkml:channelProperty channel="X" name="resolution" value="1000" units="1/cm"/>
+          <inkml:channelProperty channel="Y" name="resolution" value="1000" units="1/cm"/>
+          <inkml:channelProperty channel="F" name="resolution" value="0" units="1/dev"/>
+          <inkml:channelProperty channel="OA" name="resolution" value="1000" units="1/deg"/>
+          <inkml:channelProperty channel="OE" name="resolution" value="1000" units="1/deg"/>
+        </inkml:channelProperties>
+      </inkml:inkSource>
+      <inkml:timestamp xml:id="ts0" timeString="2026-05-19T06:25:07.353"/>
+    </inkml:context>
+    <inkml:brush xml:id="br0">
+      <inkml:brushProperty name="width" value="0.1" units="cm"/>
+      <inkml:brushProperty name="height" value="0.1" units="cm"/>
+      <inkml:brushProperty name="color" value="#FFC114"/>
+    </inkml:brush>
+  </inkml:definitions>
+  <inkml:trace contextRef="#ctx0" brushRef="#br0">25 216 6193 0 0,'-5'-11'21'0'0,"1"0"1"0"0,0-1 0 0 0,1 1-1 0 0,0-1 1 0 0,1 0 0 0 0,1 0-1 0 0,-1 0 1 0 0,2 0 0 0 0,0 0 0 0 0,0 0-1 0 0,3-16 1 0 0,-1-23 776 0 0,-2 49-752 0 0,-1-4-4 0 0,1 6-39 0 0,0 0 0 0 0,0 1 0 0 0,0-1 0 0 0,0 0 0 0 0,0 0-1 0 0,0 0 1 0 0,0 0 0 0 0,1 0 0 0 0,-1 0 0 0 0,0 0 0 0 0,0 0 0 0 0,0 0 0 0 0,0 1 0 0 0,0-1-1 0 0,0 0 1 0 0,0 0 0 0 0,0 0 0 0 0,0 0 0 0 0,0 0 0 0 0,0 0 0 0 0,0 0 0 0 0,1 0 0 0 0,-1 0-1 0 0,0 0 1 0 0,0 0 0 0 0,0 0 0 0 0,0 0 0 0 0,0 0 0 0 0,0 0 0 0 0,0 0 0 0 0,0 0 0 0 0,1 0-1 0 0,-1 0 1 0 0,0 0 0 0 0,0 0 0 0 0,0 0 0 0 0,0 0 0 0 0,0 0 0 0 0,0 0 0 0 0,0 0 0 0 0,0 0-1 0 0,1 0 1 0 0,-1 0 0 0 0,0 0 0 0 0,0 0 0 0 0,0 0 0 0 0,0 0 0 0 0,0 0 0 0 0,17 22 5 0 0,0 0 0 0 0,2-1 1 0 0,0-1-1 0 0,1-1 0 0 0,1 0 1 0 0,1-2-1 0 0,32 20 0 0 0,183 96 30 0 0,-168-98-14 0 0,-29-11-14 0 0,-29-17 222 0 0,0 0 0 0 0,0-1 1 0 0,24 9 1219 0 0,-34-15-1428 0 0,1 0 0 0 0,-1 0 0 0 0,0-1 0 0 0,0 1 0 0 0,1-1 0 0 0,-1 1 0 0 0,0-1 0 0 0,0 0 0 0 0,0 1 0 0 0,0-1 0 0 0,0 0 0 0 0,0 0 0 0 0,0 1 0 0 0,0-1 0 0 0,0 0 0 0 0,0 0 0 0 0,0 0 0 0 0,0-1 0 0 0,-1 1 0 0 0,1 0 0 0 0,0 0 0 0 0,-1 0 0 0 0,1 0 0 0 0,-1-1 0 0 0,1 1 0 0 0,-1 0 0 0 0,0 0 0 0 0,0-1 0 0 0,1 1 0 0 0,-1-2 0 0 0,4-52 403 0 0,-4 32-306 0 0,16-49 171 0 0,-11 54-337 0 0,-1-1 0 0 0,-1 0-1 0 0,2-25 1 0 0,-10 30-1455 0 0</inkml:trace>
+</inkml:ink>
+</file>
+
+<file path=ppt/ink/ink28.xml><?xml version="1.0" encoding="utf-8"?>
+<inkml:ink xmlns:inkml="http://www.w3.org/2003/InkML">
+  <inkml:definitions>
+    <inkml:context xml:id="ctx0">
+      <inkml:inkSource xml:id="inkSrc0">
+        <inkml:traceFormat>
+          <inkml:channel name="X" type="integer" min="-2.14748E9" max="2.14748E9" units="cm"/>
+          <inkml:channel name="Y" type="integer" min="-2.14748E9" max="2.14748E9" units="cm"/>
+          <inkml:channel name="F" type="integer" max="32767" units="dev"/>
+          <inkml:channel name="OA" type="integer" max="360" units="deg"/>
+          <inkml:channel name="OE" type="integer" max="90" units="deg"/>
+        </inkml:traceFormat>
+        <inkml:channelProperties>
+          <inkml:channelProperty channel="X" name="resolution" value="1000" units="1/cm"/>
+          <inkml:channelProperty channel="Y" name="resolution" value="1000" units="1/cm"/>
+          <inkml:channelProperty channel="F" name="resolution" value="0" units="1/dev"/>
+          <inkml:channelProperty channel="OA" name="resolution" value="1000" units="1/deg"/>
+          <inkml:channelProperty channel="OE" name="resolution" value="1000" units="1/deg"/>
+        </inkml:channelProperties>
+      </inkml:inkSource>
+      <inkml:timestamp xml:id="ts0" timeString="2026-05-19T06:25:08.961"/>
+    </inkml:context>
+    <inkml:brush xml:id="br0">
+      <inkml:brushProperty name="width" value="0.1" units="cm"/>
+      <inkml:brushProperty name="height" value="0.1" units="cm"/>
+      <inkml:brushProperty name="color" value="#FFC114"/>
+    </inkml:brush>
+  </inkml:definitions>
+  <inkml:trace contextRef="#ctx0" brushRef="#br0">1 45 6129 0 0,'0'0'-280'0'0,"0"-42"1297"0"0,0 40-404 0 0,17 25-619 0 0,-9-14 6 0 0,34 37 9 0 0,1-2 0 0 0,3-1 0 0 0,97 69 0 0 0,173 87 129 0 0,-232-149-124 0 0,39 20 59 0 0,3-5 0 0 0,171 62-1 0 0,128 60 30 0 0,-32-12 2 0 0,-224-115-74 0 0,-87-33-17 0 0,-2 3 1 0 0,111 58-1 0 0,-74-24 16 0 0,-115-63-31 0 0,2 1 4 0 0,1 1 0 0 0,-1 0 0 0 0,1 0 0 0 0,-1 0 0 0 0,0 0 0 0 0,-1 1-1 0 0,8 8 1 0 0,-4-4 11 0 0,1 0-1 0 0,1 0 1 0 0,-1-1-1 0 0,1 0 0 0 0,0-1 1 0 0,1 0-1 0 0,19 9 1 0 0,-3-1-20 0 0,-10-4 21 0 0,6 3 3 0 0,0 1 1 0 0,-2 0 0 0 0,23 21 0 0 0,-11-6 1172 0 0,-38-33-2671 0 0,1 1 1000 0 0,4 2 295 0 0,-1 0 0 0 0,0 0 0 0 0,0 0 1 0 0,1 0-1 0 0,-1 0 0 0 0,1-1 0 0 0,-1 1 1 0 0,1 0-1 0 0,-1-1 0 0 0,1 1 0 0 0,0-1 1 0 0,0 0-1 0 0,0 1 0 0 0,0-1 0 0 0,0 0 1 0 0,0 0-1 0 0,-1-2 0 0 0,-1-6-2217 0 0</inkml:trace>
+</inkml:ink>
+</file>
+
+<file path=ppt/ink/ink29.xml><?xml version="1.0" encoding="utf-8"?>
+<inkml:ink xmlns:inkml="http://www.w3.org/2003/InkML">
+  <inkml:definitions>
+    <inkml:context xml:id="ctx0">
+      <inkml:inkSource xml:id="inkSrc0">
+        <inkml:traceFormat>
+          <inkml:channel name="X" type="integer" min="-2.14748E9" max="2.14748E9" units="cm"/>
+          <inkml:channel name="Y" type="integer" min="-2.14748E9" max="2.14748E9" units="cm"/>
+          <inkml:channel name="F" type="integer" max="32767" units="dev"/>
+          <inkml:channel name="OA" type="integer" max="360" units="deg"/>
+          <inkml:channel name="OE" type="integer" max="90" units="deg"/>
+        </inkml:traceFormat>
+        <inkml:channelProperties>
+          <inkml:channelProperty channel="X" name="resolution" value="1000" units="1/cm"/>
+          <inkml:channelProperty channel="Y" name="resolution" value="1000" units="1/cm"/>
+          <inkml:channelProperty channel="F" name="resolution" value="0" units="1/dev"/>
+          <inkml:channelProperty channel="OA" name="resolution" value="1000" units="1/deg"/>
+          <inkml:channelProperty channel="OE" name="resolution" value="1000" units="1/deg"/>
+        </inkml:channelProperties>
+      </inkml:inkSource>
+      <inkml:timestamp xml:id="ts0" timeString="2026-05-19T06:25:09.619"/>
+    </inkml:context>
+    <inkml:brush xml:id="br0">
+      <inkml:brushProperty name="width" value="0.1" units="cm"/>
+      <inkml:brushProperty name="height" value="0.1" units="cm"/>
+      <inkml:brushProperty name="color" value="#FFC114"/>
+    </inkml:brush>
+  </inkml:definitions>
+  <inkml:trace contextRef="#ctx0" brushRef="#br0">542 157 5641 0 0,'-1'-10'105'0'0,"-1"1"1"0"0,0-1 0 0 0,-1 1 0 0 0,0-1-1 0 0,0 1 1 0 0,-1 0 0 0 0,0 0 0 0 0,-1 1-1 0 0,0-1 1 0 0,-8-9 0 0 0,-10-14 1154 0 0,23 31-1143 0 0,-1 0-78 0 0,1 0-1 0 0,-1 0 1 0 0,0 0-1 0 0,1 0 0 0 0,-1 0 1 0 0,0 0-1 0 0,0 1 1 0 0,1-1-1 0 0,-1 0 0 0 0,0 1 1 0 0,0-1-1 0 0,0 0 0 0 0,0 1 1 0 0,0-1-1 0 0,0 1 1 0 0,0-1-1 0 0,0 1 0 0 0,-1-1 1 0 0,0 20-27 0 0,1-1 1 0 0,1 1-1 0 0,1-1 0 0 0,0 0 1 0 0,2 1-1 0 0,0-1 1 0 0,1 0-1 0 0,9 26 1 0 0,1-9 10 0 0,1 0 1 0 0,2-1 0 0 0,25 39 0 0 0,-31-56-46 0 0,-6-10 61 0 0,0 0-1 0 0,0 0 1 0 0,-1 1 0 0 0,0 0-1 0 0,-1-1 1 0 0,4 13 0 0 0,-7-17 3 0 0,1 0 0 0 0,-1-1-1 0 0,0 1 1 0 0,0 0 0 0 0,0-1 0 0 0,0 1 0 0 0,-1 0 0 0 0,1 0 0 0 0,-1-1 0 0 0,1 1-1 0 0,-1 0 1 0 0,0-1 0 0 0,0 1 0 0 0,0-1 0 0 0,0 1 0 0 0,-1-1 0 0 0,1 0 0 0 0,-1 0-1 0 0,0 1 1 0 0,1-1 0 0 0,-1 0 0 0 0,0 0 0 0 0,0 0 0 0 0,0-1 0 0 0,-4 3 0 0 0,-16 12 129 0 0,0-1 0 0 0,-1-1 1 0 0,-1-1-1 0 0,0-2 1 0 0,-29 11-1 0 0,-137 37 380 0 0,141-46-402 0 0,-126 35-885 0 0</inkml:trace>
+</inkml:ink>
+</file>
+
 <file path=ppt/ink/ink3.xml><?xml version="1.0" encoding="utf-8"?>
 <inkml:ink xmlns:inkml="http://www.w3.org/2003/InkML">
   <inkml:definitions>
@@ -832,6 +1056,326 @@
 </inkml:ink>
 </file>
 
+<file path=ppt/ink/ink30.xml><?xml version="1.0" encoding="utf-8"?>
+<inkml:ink xmlns:inkml="http://www.w3.org/2003/InkML">
+  <inkml:definitions>
+    <inkml:context xml:id="ctx0">
+      <inkml:inkSource xml:id="inkSrc0">
+        <inkml:traceFormat>
+          <inkml:channel name="X" type="integer" min="-2.14748E9" max="2.14748E9" units="cm"/>
+          <inkml:channel name="Y" type="integer" min="-2.14748E9" max="2.14748E9" units="cm"/>
+          <inkml:channel name="F" type="integer" max="32767" units="dev"/>
+          <inkml:channel name="OA" type="integer" max="360" units="deg"/>
+          <inkml:channel name="OE" type="integer" max="90" units="deg"/>
+        </inkml:traceFormat>
+        <inkml:channelProperties>
+          <inkml:channelProperty channel="X" name="resolution" value="1000" units="1/cm"/>
+          <inkml:channelProperty channel="Y" name="resolution" value="1000" units="1/cm"/>
+          <inkml:channelProperty channel="F" name="resolution" value="0" units="1/dev"/>
+          <inkml:channelProperty channel="OA" name="resolution" value="1000" units="1/deg"/>
+          <inkml:channelProperty channel="OE" name="resolution" value="1000" units="1/deg"/>
+        </inkml:channelProperties>
+      </inkml:inkSource>
+      <inkml:timestamp xml:id="ts0" timeString="2026-05-19T06:25:11.653"/>
+    </inkml:context>
+    <inkml:brush xml:id="br0">
+      <inkml:brushProperty name="width" value="0.1" units="cm"/>
+      <inkml:brushProperty name="height" value="0.1" units="cm"/>
+      <inkml:brushProperty name="color" value="#FFC114"/>
+    </inkml:brush>
+  </inkml:definitions>
+  <inkml:trace contextRef="#ctx0" brushRef="#br0">273 49 6209 0 0,'-8'-41'-310'0'0,"8"40"390"0"0,-1-5-5 0 0,1 6-68 0 0,0 0 0 0 0,0 0 1 0 0,0 0-1 0 0,0 0 0 0 0,0 0 0 0 0,-1 0 1 0 0,1 0-1 0 0,0 0 0 0 0,0 0 0 0 0,0 0 1 0 0,0 0-1 0 0,0 0 0 0 0,0 0 1 0 0,0 1-1 0 0,0-1 0 0 0,0 0 0 0 0,0 0 1 0 0,0 0-1 0 0,0 0 0 0 0,0 0 0 0 0,0 0 1 0 0,-1 0-1 0 0,1 0 0 0 0,0 0 1 0 0,0 0-1 0 0,0 0 0 0 0,0 0 0 0 0,0 0 1 0 0,0 0-1 0 0,0 0 0 0 0,-3 75 168 0 0,7 90-1 0 0,2-13-28 0 0,-9-32 24 0 0,0-49 40 0 0,8 96-1 0 0,-4-157-288 0 0,0-5 249 0 0,0 0 0 0 0,0-1-1 0 0,0 1 1 0 0,-1 0 0 0 0,0 0 0 0 0,0-1 0 0 0,-1 1-1 0 0,1 0 1 0 0,-1 0 0 0 0,0-1 0 0 0,0 1-1 0 0,0 0 1 0 0,-4 6 0 0 0,4-10 361 0 0,-4-2-307 0 0,-7-3-128 0 0,1 0-1 0 0,0-1 1 0 0,0 0 0 0 0,0-1 0 0 0,0-1 0 0 0,1 1 0 0 0,0-2 0 0 0,0 1 0 0 0,1-1 0 0 0,-13-15-1 0 0,-12-15 76 0 0,-36-52-1 0 0,53 67-107 0 0,10 15-149 0 0,6 10 37 0 0,12 26 29 0 0,26 40 21 0 0,-22-47-8 0 0,0-1 0 0 0,22 21-1 0 0,-31-35 10 0 0,0 0 0 0 0,1 0 0 0 0,0-1 0 0 0,0 0 0 0 0,0-1 0 0 0,0 0 0 0 0,1 0 0 0 0,-1 0 0 0 0,17 5 0 0 0,-19-9 4 0 0,0 0 0 0 0,0 0-1 0 0,0 0 1 0 0,-1 0 0 0 0,1-1-1 0 0,0 0 1 0 0,0 0 0 0 0,-1 0-1 0 0,1-1 1 0 0,-1 1 0 0 0,1-1-1 0 0,4-3 1 0 0,-2 2-10 0 0,66-35 1 0 0,-49 24-5 0 0,1 1-1 0 0,34-12 0 0 0,-26 5-797 0 0,-16 5-3108 0 0</inkml:trace>
+</inkml:ink>
+</file>
+
+<file path=ppt/ink/ink31.xml><?xml version="1.0" encoding="utf-8"?>
+<inkml:ink xmlns:inkml="http://www.w3.org/2003/InkML">
+  <inkml:definitions>
+    <inkml:context xml:id="ctx0">
+      <inkml:inkSource xml:id="inkSrc0">
+        <inkml:traceFormat>
+          <inkml:channel name="X" type="integer" min="-2.14748E9" max="2.14748E9" units="cm"/>
+          <inkml:channel name="Y" type="integer" min="-2.14748E9" max="2.14748E9" units="cm"/>
+          <inkml:channel name="F" type="integer" max="32767" units="dev"/>
+          <inkml:channel name="OA" type="integer" max="360" units="deg"/>
+          <inkml:channel name="OE" type="integer" max="90" units="deg"/>
+        </inkml:traceFormat>
+        <inkml:channelProperties>
+          <inkml:channelProperty channel="X" name="resolution" value="1000" units="1/cm"/>
+          <inkml:channelProperty channel="Y" name="resolution" value="1000" units="1/cm"/>
+          <inkml:channelProperty channel="F" name="resolution" value="0" units="1/dev"/>
+          <inkml:channelProperty channel="OA" name="resolution" value="1000" units="1/deg"/>
+          <inkml:channelProperty channel="OE" name="resolution" value="1000" units="1/deg"/>
+        </inkml:channelProperties>
+      </inkml:inkSource>
+      <inkml:timestamp xml:id="ts0" timeString="2026-05-19T06:25:13.044"/>
+    </inkml:context>
+    <inkml:brush xml:id="br0">
+      <inkml:brushProperty name="width" value="0.1" units="cm"/>
+      <inkml:brushProperty name="height" value="0.1" units="cm"/>
+      <inkml:brushProperty name="color" value="#FFC114"/>
+    </inkml:brush>
+  </inkml:definitions>
+  <inkml:trace contextRef="#ctx0" brushRef="#br0">337 141 5593 0 0,'-3'-39'-839'0'0,"-9"-28"2213"0"0,11 65-1164 0 0,-17-29 1380 0 0,17 30-1515 0 0,-3 24-48 0 0,2 0 0 0 0,1 0-1 0 0,0 1 1 0 0,6 42 0 0 0,-2-23-6 0 0,3 89-3 0 0,10 141 85 0 0,-5-186 1268 0 0,-11-85-811 0 0,-24-4 80 0 0,2-8-472 0 0,0 0-1 0 0,1-2 1 0 0,1-1 0 0 0,-26-20 0 0 0,-74-71 179 0 0,79 66-235 0 0,22 21-199 0 0,30 25 6 0 0,39 28 37 0 0,14-8 40 0 0,1-3-1 0 0,1-3 0 0 0,89 18 1 0 0,-76-20 105 0 0,-75-19-52 0 0,3-5-15 0 0,-6 5-34 0 0,-1-1 1 0 0,1 0-1 0 0,-1 0 1 0 0,1 0 0 0 0,-1 0-1 0 0,1-1 1 0 0,-1 1-1 0 0,1 0 1 0 0,-1 0 0 0 0,1 0-1 0 0,-1 0 1 0 0,1 0-1 0 0,-1-1 1 0 0,1 1 0 0 0,-1 0-1 0 0,0 0 1 0 0,1-1-1 0 0,-1 1 1 0 0,1 0 0 0 0,-1-1-1 0 0,0 1 1 0 0,1 0-1 0 0,-1-1 1 0 0,0 1 0 0 0,1-1-1 0 0,-1 0 1 0 0,5-22-47 0 0,-4 13-29 0 0,1 1 0 0 0,0-1-1 0 0,0 1 1 0 0,1-1-1 0 0,0 1 1 0 0,0 0-1 0 0,1 0 1 0 0,1 0-1 0 0,-1 1 1 0 0,1 0 0 0 0,1-1-1 0 0,8-9 1 0 0,-6 13-359 0 0,24 12-8368 0 0</inkml:trace>
+</inkml:ink>
+</file>
+
+<file path=ppt/ink/ink32.xml><?xml version="1.0" encoding="utf-8"?>
+<inkml:ink xmlns:inkml="http://www.w3.org/2003/InkML">
+  <inkml:definitions>
+    <inkml:context xml:id="ctx0">
+      <inkml:inkSource xml:id="inkSrc0">
+        <inkml:traceFormat>
+          <inkml:channel name="X" type="integer" min="-2.14748E9" max="2.14748E9" units="cm"/>
+          <inkml:channel name="Y" type="integer" min="-2.14748E9" max="2.14748E9" units="cm"/>
+          <inkml:channel name="F" type="integer" max="32767" units="dev"/>
+          <inkml:channel name="OA" type="integer" max="360" units="deg"/>
+          <inkml:channel name="OE" type="integer" max="90" units="deg"/>
+        </inkml:traceFormat>
+        <inkml:channelProperties>
+          <inkml:channelProperty channel="X" name="resolution" value="1000" units="1/cm"/>
+          <inkml:channelProperty channel="Y" name="resolution" value="1000" units="1/cm"/>
+          <inkml:channelProperty channel="F" name="resolution" value="0" units="1/dev"/>
+          <inkml:channelProperty channel="OA" name="resolution" value="1000" units="1/deg"/>
+          <inkml:channelProperty channel="OE" name="resolution" value="1000" units="1/deg"/>
+        </inkml:channelProperties>
+      </inkml:inkSource>
+      <inkml:timestamp xml:id="ts0" timeString="2026-05-19T06:25:14.543"/>
+    </inkml:context>
+    <inkml:brush xml:id="br0">
+      <inkml:brushProperty name="width" value="0.1" units="cm"/>
+      <inkml:brushProperty name="height" value="0.1" units="cm"/>
+      <inkml:brushProperty name="color" value="#FFC114"/>
+    </inkml:brush>
+  </inkml:definitions>
+  <inkml:trace contextRef="#ctx0" brushRef="#br0">236 82 6097 0 0,'-6'-28'-679'0'0,"5"24"709"0"0,1 0 0 0 0,-1 0 0 0 0,0 0 0 0 0,0 0 0 0 0,0 0 0 0 0,0 1 0 0 0,-1-1 0 0 0,1 0 0 0 0,-1 1 0 0 0,0-1 0 0 0,0 1 0 0 0,-3-4 0 0 0,4 6 0 0 0,-9 23-61 0 0,4-6 48 0 0,0 1 0 0 0,2 0 0 0 0,0 0 0 0 0,1 1 0 0 0,1-1 0 0 0,1 0-1 0 0,0 1 1 0 0,2 20 0 0 0,-1-27-5 0 0,17 287 383 0 0,-11-261-375 0 0,2 0-1 0 0,21 61 1 0 0,-17-62 35 0 0,-2 1 0 0 0,10 59 0 0 0,-17-76 14 0 0,-2-16 55 0 0,0-1 1 0 0,0 1-1 0 0,0 0 0 0 0,-1 0 1 0 0,0-1-1 0 0,0 1 0 0 0,0 0 1 0 0,0 0-1 0 0,0 0 1 0 0,-1-1-1 0 0,1 1 0 0 0,-1 0 1 0 0,0 0-1 0 0,0-1 1 0 0,-1 1-1 0 0,-1 4 0 0 0,2-7 149 0 0,-4-1-78 0 0,-1-1-1 0 0,1 1 1 0 0,0-1-1 0 0,0 0 1 0 0,0-1 0 0 0,-7-2-1 0 0,8 3-208 0 0,-4-2 106 0 0,0-2 1 0 0,1 1 0 0 0,0-1 0 0 0,-1 0-1 0 0,1 0 1 0 0,1-1 0 0 0,-1 0 0 0 0,1 0-1 0 0,-8-10 1 0 0,-43-68 281 0 0,44 63-271 0 0,-6-11 18 0 0,10 16-72 0 0,0 1 1 0 0,-1-1-1 0 0,-18-19 0 0 0,26 33-50 0 0,4 7-13 0 0,2 9 12 0 0,2-1 0 0 0,-1 0 1 0 0,2 0-1 0 0,0-1 0 0 0,0 1 0 0 0,1-2 0 0 0,1 1 0 0 0,0-1 0 0 0,0 0 1 0 0,1-1-1 0 0,1 0 0 0 0,0-1 0 0 0,0 0 0 0 0,0-1 0 0 0,1 0 0 0 0,1-1 1 0 0,-1 0-1 0 0,1-1 0 0 0,0 0 0 0 0,21 6 0 0 0,-19-7 9 0 0,1-1 1 0 0,-1 0-1 0 0,1-1 0 0 0,-1-1 1 0 0,1-1-1 0 0,0 0 0 0 0,0-1 1 0 0,0 0-1 0 0,0-1 0 0 0,0-1 1 0 0,-1-1-1 0 0,1 0 0 0 0,-1-1 1 0 0,1-1-1 0 0,-1 0 0 0 0,-1-1 0 0 0,1 0 1 0 0,20-13-1 0 0,-23 10 11 0 0,-1 0-1 0 0,0-1 1 0 0,0 0-1 0 0,-1-1 1 0 0,0 0-1 0 0,-1 0 1 0 0,0-1-1 0 0,8-15 0 0 0,-15 23 17 0 0,11-31-995 0 0,-13 33 299 0 0</inkml:trace>
+</inkml:ink>
+</file>
+
+<file path=ppt/ink/ink33.xml><?xml version="1.0" encoding="utf-8"?>
+<inkml:ink xmlns:inkml="http://www.w3.org/2003/InkML">
+  <inkml:definitions>
+    <inkml:context xml:id="ctx0">
+      <inkml:inkSource xml:id="inkSrc0">
+        <inkml:traceFormat>
+          <inkml:channel name="X" type="integer" min="-2.14748E9" max="2.14748E9" units="cm"/>
+          <inkml:channel name="Y" type="integer" min="-2.14748E9" max="2.14748E9" units="cm"/>
+          <inkml:channel name="F" type="integer" max="32767" units="dev"/>
+          <inkml:channel name="OA" type="integer" max="360" units="deg"/>
+          <inkml:channel name="OE" type="integer" max="90" units="deg"/>
+        </inkml:traceFormat>
+        <inkml:channelProperties>
+          <inkml:channelProperty channel="X" name="resolution" value="1000" units="1/cm"/>
+          <inkml:channelProperty channel="Y" name="resolution" value="1000" units="1/cm"/>
+          <inkml:channelProperty channel="F" name="resolution" value="0" units="1/dev"/>
+          <inkml:channelProperty channel="OA" name="resolution" value="1000" units="1/deg"/>
+          <inkml:channelProperty channel="OE" name="resolution" value="1000" units="1/deg"/>
+        </inkml:channelProperties>
+      </inkml:inkSource>
+      <inkml:timestamp xml:id="ts0" timeString="2026-05-19T06:25:16.980"/>
+    </inkml:context>
+    <inkml:brush xml:id="br0">
+      <inkml:brushProperty name="width" value="0.1" units="cm"/>
+      <inkml:brushProperty name="height" value="0.1" units="cm"/>
+      <inkml:brushProperty name="color" value="#FFC114"/>
+    </inkml:brush>
+  </inkml:definitions>
+  <inkml:trace contextRef="#ctx0" brushRef="#br0">479 0 5825 0 0,'0'0'176'0'0,"-4"3"-160"0"0,0-1-12 0 0,1 1 0 0 0,0 0 1 0 0,0 0-1 0 0,0 0 0 0 0,0 1 1 0 0,0-1-1 0 0,1 1 1 0 0,0-1-1 0 0,-1 1 0 0 0,1 0 1 0 0,1 0-1 0 0,-3 6 0 0 0,-21 66 120 0 0,9-27-30 0 0,12-37-75 0 0,-95 295 484 0 0,6 97 1168 0 0,85-371-1428 0 0,-3-1 0 0 0,0 0 1 0 0,-18 34-1 0 0,-1 19 369 0 0,28-83-588 0 0,1 1 1 0 0,0-1-1 0 0,0 1 1 0 0,0-1-1 0 0,0 1 0 0 0,0-1 1 0 0,1 1-1 0 0,-1 0 1 0 0,1 4-1 0 0,0-6 11 0 0,-17 31 429 0 0,0 7-267 0 0,-25 114-118 0 0,33-115-56 0 0,-5 7 90 0 0,14-43-23 0 0,-4 8 309 0 0,3-5-578 0 0,5-14-2135 0 0,0 0 1296 0 0,0 0-1 0 0,1 0 0 0 0,0 0 0 0 0,6-8 0 0 0,2 2-1251 0 0</inkml:trace>
+</inkml:ink>
+</file>
+
+<file path=ppt/ink/ink34.xml><?xml version="1.0" encoding="utf-8"?>
+<inkml:ink xmlns:inkml="http://www.w3.org/2003/InkML">
+  <inkml:definitions>
+    <inkml:context xml:id="ctx0">
+      <inkml:inkSource xml:id="inkSrc0">
+        <inkml:traceFormat>
+          <inkml:channel name="X" type="integer" min="-2.14748E9" max="2.14748E9" units="cm"/>
+          <inkml:channel name="Y" type="integer" min="-2.14748E9" max="2.14748E9" units="cm"/>
+          <inkml:channel name="F" type="integer" max="32767" units="dev"/>
+          <inkml:channel name="OA" type="integer" max="360" units="deg"/>
+          <inkml:channel name="OE" type="integer" max="90" units="deg"/>
+        </inkml:traceFormat>
+        <inkml:channelProperties>
+          <inkml:channelProperty channel="X" name="resolution" value="1000" units="1/cm"/>
+          <inkml:channelProperty channel="Y" name="resolution" value="1000" units="1/cm"/>
+          <inkml:channelProperty channel="F" name="resolution" value="0" units="1/dev"/>
+          <inkml:channelProperty channel="OA" name="resolution" value="1000" units="1/deg"/>
+          <inkml:channelProperty channel="OE" name="resolution" value="1000" units="1/deg"/>
+        </inkml:channelProperties>
+      </inkml:inkSource>
+      <inkml:timestamp xml:id="ts0" timeString="2026-05-19T06:25:17.445"/>
+    </inkml:context>
+    <inkml:brush xml:id="br0">
+      <inkml:brushProperty name="width" value="0.1" units="cm"/>
+      <inkml:brushProperty name="height" value="0.1" units="cm"/>
+      <inkml:brushProperty name="color" value="#FFC114"/>
+    </inkml:brush>
+  </inkml:definitions>
+  <inkml:trace contextRef="#ctx0" brushRef="#br0">47 233 5525 0 0,'-6'-17'2'0'0,"1"1"1"0"0,0-1-1 0 0,2 0 1 0 0,0 0 0 0 0,1-1-1 0 0,0-18 1 0 0,-2-16 1121 0 0,-2 11-20 0 0,6 40-580 0 0,-2 6-466 0 0,-1 13-20 0 0,0-1 0 0 0,1 1 0 0 0,1 0 0 0 0,1 0 0 0 0,1 0 0 0 0,0 0 0 0 0,7 30 0 0 0,1 33 37 0 0,-8-57-62 0 0,2 0-1 0 0,6 26 1 0 0,-7-42-8 0 0,0 0 1 0 0,0 0-1 0 0,1 0 1 0 0,0 0-1 0 0,0 0 1 0 0,1-1-1 0 0,0 1 1 0 0,1-1-1 0 0,7 10 1 0 0,-10-15 2 0 0,1 0-1 0 0,-1-1 1 0 0,0 1 0 0 0,1-1 0 0 0,-1 1 0 0 0,1-1-1 0 0,-1 0 1 0 0,1 0 0 0 0,0 0 0 0 0,0 0 0 0 0,-1 0-1 0 0,1-1 1 0 0,0 1 0 0 0,0-1 0 0 0,0 0 0 0 0,0 1-1 0 0,-1-2 1 0 0,1 1 0 0 0,5-1 0 0 0,57-16 79 0 0,-45 11-68 0 0,182-72 189 0 0,-1 1 49 0 0,-186 69-2456 0 0,-8 4-714 0 0</inkml:trace>
+</inkml:ink>
+</file>
+
+<file path=ppt/ink/ink35.xml><?xml version="1.0" encoding="utf-8"?>
+<inkml:ink xmlns:inkml="http://www.w3.org/2003/InkML">
+  <inkml:definitions>
+    <inkml:context xml:id="ctx0">
+      <inkml:inkSource xml:id="inkSrc0">
+        <inkml:traceFormat>
+          <inkml:channel name="X" type="integer" min="-2.14748E9" max="2.14748E9" units="cm"/>
+          <inkml:channel name="Y" type="integer" min="-2.14748E9" max="2.14748E9" units="cm"/>
+          <inkml:channel name="F" type="integer" max="32767" units="dev"/>
+          <inkml:channel name="OA" type="integer" max="360" units="deg"/>
+          <inkml:channel name="OE" type="integer" max="90" units="deg"/>
+        </inkml:traceFormat>
+        <inkml:channelProperties>
+          <inkml:channelProperty channel="X" name="resolution" value="1000" units="1/cm"/>
+          <inkml:channelProperty channel="Y" name="resolution" value="1000" units="1/cm"/>
+          <inkml:channelProperty channel="F" name="resolution" value="0" units="1/dev"/>
+          <inkml:channelProperty channel="OA" name="resolution" value="1000" units="1/deg"/>
+          <inkml:channelProperty channel="OE" name="resolution" value="1000" units="1/deg"/>
+        </inkml:channelProperties>
+      </inkml:inkSource>
+      <inkml:timestamp xml:id="ts0" timeString="2026-05-19T06:25:20.860"/>
+    </inkml:context>
+    <inkml:brush xml:id="br0">
+      <inkml:brushProperty name="width" value="0.1" units="cm"/>
+      <inkml:brushProperty name="height" value="0.1" units="cm"/>
+      <inkml:brushProperty name="color" value="#FFC114"/>
+    </inkml:brush>
+  </inkml:definitions>
+  <inkml:trace contextRef="#ctx0" brushRef="#br0">247 114 6473 0 0,'3'-37'-612'0'0,"-14"-37"2176"0"0,11 71-1303 0 0,2 8-250 0 0,5 11-2 0 0,-1 1-1 0 0,7 29 0 0 0,12 34 9 0 0,-22-73-19 0 0,0-1 1 0 0,0 0 0 0 0,0 0 0 0 0,1 0-1 0 0,0-1 1 0 0,0 1 0 0 0,0-1-1 0 0,1 0 1 0 0,0 0 0 0 0,5 4 0 0 0,-4-6 9 0 0,0 0 0 0 0,-1-1 0 0 0,1 1 0 0 0,0-1 0 0 0,0 0 0 0 0,1-1 0 0 0,-1 0 0 0 0,0 1 0 0 0,0-2 0 0 0,1 1 0 0 0,-1-1 0 0 0,0 0 1 0 0,1 0-1 0 0,-1-1 0 0 0,0 0 0 0 0,1 0 0 0 0,-1-1 0 0 0,0 1 0 0 0,9-5 0 0 0,9-2 20 0 0,-1-2 0 0 0,0-1 0 0 0,33-20-1 0 0,-37 19 132 0 0,0 0 0 0 0,-1-2 0 0 0,-1 0 0 0 0,0 0 0 0 0,27-32 0 0 0,-43 45 354 0 0,-6 6-448 0 0,-158 166 216 0 0,7-9-175 0 0,-170 232 72 0 0,306-367-148 0 0,8-10 497 0 0,-2 1 0 0 0,-21 21 0 0 0,33-38-357 0 0,10-10-766 0 0,-1 0 1 0 0,1 0-1 0 0,1 1 0 0 0,-1 0 0 0 0,1 1 1 0 0,1 0-1 0 0,16-10 0 0 0,10-10-1853 0 0,0 0-355 0 0</inkml:trace>
+</inkml:ink>
+</file>
+
+<file path=ppt/ink/ink36.xml><?xml version="1.0" encoding="utf-8"?>
+<inkml:ink xmlns:inkml="http://www.w3.org/2003/InkML">
+  <inkml:definitions>
+    <inkml:context xml:id="ctx0">
+      <inkml:inkSource xml:id="inkSrc0">
+        <inkml:traceFormat>
+          <inkml:channel name="X" type="integer" min="-2.14748E9" max="2.14748E9" units="cm"/>
+          <inkml:channel name="Y" type="integer" min="-2.14748E9" max="2.14748E9" units="cm"/>
+          <inkml:channel name="F" type="integer" max="32767" units="dev"/>
+          <inkml:channel name="OA" type="integer" max="360" units="deg"/>
+          <inkml:channel name="OE" type="integer" max="90" units="deg"/>
+        </inkml:traceFormat>
+        <inkml:channelProperties>
+          <inkml:channelProperty channel="X" name="resolution" value="1000" units="1/cm"/>
+          <inkml:channelProperty channel="Y" name="resolution" value="1000" units="1/cm"/>
+          <inkml:channelProperty channel="F" name="resolution" value="0" units="1/dev"/>
+          <inkml:channelProperty channel="OA" name="resolution" value="1000" units="1/deg"/>
+          <inkml:channelProperty channel="OE" name="resolution" value="1000" units="1/deg"/>
+        </inkml:channelProperties>
+      </inkml:inkSource>
+      <inkml:timestamp xml:id="ts0" timeString="2026-05-19T06:25:21.470"/>
+    </inkml:context>
+    <inkml:brush xml:id="br0">
+      <inkml:brushProperty name="width" value="0.1" units="cm"/>
+      <inkml:brushProperty name="height" value="0.1" units="cm"/>
+      <inkml:brushProperty name="color" value="#FFC114"/>
+    </inkml:brush>
+  </inkml:definitions>
+  <inkml:trace contextRef="#ctx0" brushRef="#br0">54 159 6161 0 0,'0'0'-37'0'0,"-1"0"1"0"0,1 0 0 0 0,0 0 0 0 0,0 0 0 0 0,0 0 0 0 0,0 0 0 0 0,0 0 0 0 0,-1 1 0 0 0,1-1 0 0 0,0 0 0 0 0,0 0-1 0 0,0 0 1 0 0,0 0 0 0 0,0 0 0 0 0,0 1 0 0 0,0-1 0 0 0,0 0 0 0 0,0 0 0 0 0,0 0 0 0 0,-1 0 0 0 0,1 1 0 0 0,0-1-1 0 0,0 0 1 0 0,0 0 0 0 0,0 0 0 0 0,0 1 0 0 0,0-1 0 0 0,0 0 0 0 0,0 0 0 0 0,0 0 0 0 0,1 0 0 0 0,-1 1-1 0 0,0-1 1 0 0,0 0 0 0 0,0 0 0 0 0,0 0 0 0 0,0 0 0 0 0,0 1 0 0 0,0-1 0 0 0,0 0 0 0 0,0 0 0 0 0,0 0 0 0 0,1 0-1 0 0,-1 0 1 0 0,0 1 0 0 0,0-1 0 0 0,0 0 0 0 0,0 0 0 0 0,0 0 0 0 0,1 0 0 0 0,-1 0 0 0 0,0 0 0 0 0,0 0 0 0 0,0 0-1 0 0,0 0 1 0 0,1 0 0 0 0,-1 0 0 0 0,0 0 0 0 0,10 1 70 0 0,-1-2 1 0 0,0 0-1 0 0,1 0 1 0 0,-1 0-1 0 0,0-1 0 0 0,0-1 1 0 0,0 1-1 0 0,0-2 0 0 0,16-7 1 0 0,-19 8 42 0 0,0 0 0 0 0,-1 0 0 0 0,1 0 0 0 0,-1-1 0 0 0,0 1 0 0 0,0-1 1 0 0,0-1-1 0 0,-1 1 0 0 0,1-1 0 0 0,-1 0 0 0 0,0 0 0 0 0,0 0 0 0 0,-1 0 0 0 0,0-1 1 0 0,0 1-1 0 0,4-9 0 0 0,-7 12-34 0 0,1 0 0 0 0,-1 1 0 0 0,1-1 1 0 0,-1 0-1 0 0,0 0 0 0 0,0 0 0 0 0,1 0 0 0 0,-1 0 0 0 0,-1 0 1 0 0,1 1-1 0 0,0-1 0 0 0,0 0 0 0 0,-1 0 0 0 0,1 0 1 0 0,-1 0-1 0 0,1 1 0 0 0,-1-1 0 0 0,0 0 0 0 0,0 0 0 0 0,0 1 1 0 0,0-1-1 0 0,0 1 0 0 0,0-1 0 0 0,0 1 0 0 0,0-1 1 0 0,-1 1-1 0 0,1 0 0 0 0,-1-1 0 0 0,1 1 0 0 0,-1 0 0 0 0,1 0 1 0 0,-1 0-1 0 0,0 0 0 0 0,1 1 0 0 0,-1-1 0 0 0,0 0 0 0 0,-2 0 1 0 0,2 1 24 0 0,2 0-64 0 0,-1 0 1 0 0,1 1-1 0 0,-1-1 1 0 0,1 0 0 0 0,-1 0-1 0 0,0 1 1 0 0,1-1-1 0 0,-1 0 1 0 0,1 0-1 0 0,-1 0 1 0 0,1 0 0 0 0,-1 0-1 0 0,0 0 1 0 0,1 0-1 0 0,-1 0 1 0 0,1 0 0 0 0,-1 0-1 0 0,0 0 1 0 0,1 0-1 0 0,-1 0 1 0 0,1 0-1 0 0,-1 0 1 0 0,0-1 0 0 0,-18 0 73 0 0,3 6-29 0 0,1 0 0 0 0,0 0-1 0 0,0 1 1 0 0,-25 15 0 0 0,34-17-49 0 0,1-1 0 0 0,-1 1-1 0 0,0 1 1 0 0,1-1 0 0 0,0 1 0 0 0,0 0 0 0 0,0 0 0 0 0,1 1 0 0 0,0-1 0 0 0,0 1 0 0 0,0 0 0 0 0,1 0 0 0 0,-1 0-1 0 0,-2 8 1 0 0,6-12-4 0 0,-1 1-1 0 0,0-1 0 0 0,1 1 0 0 0,-1-1 0 0 0,1 1 1 0 0,0-1-1 0 0,0 1 0 0 0,0 0 0 0 0,0-1 0 0 0,0 1 1 0 0,0-1-1 0 0,1 1 0 0 0,-1-1 0 0 0,1 1 1 0 0,0-1-1 0 0,0 1 0 0 0,0-1 0 0 0,0 0 0 0 0,0 1 1 0 0,0-1-1 0 0,4 4 0 0 0,-2-2 4 0 0,1-1 0 0 0,0 1 0 0 0,1 0 1 0 0,-1-1-1 0 0,0 0 0 0 0,1 0 0 0 0,0-1 0 0 0,0 1 0 0 0,9 3 1 0 0,7 0 14 0 0,0 0 0 0 0,0-2-1 0 0,0 0 1 0 0,27 1 0 0 0,-31-4-150 0 0,51 0 323 0 0,-63-1-531 0 0,-1-1-1 0 0,1 1 1 0 0,-1-1 0 0 0,1-1-1 0 0,-1 1 1 0 0,0 0-1 0 0,0-1 1 0 0,0 0-1 0 0,0 0 1 0 0,0 0-1 0 0,0-1 1 0 0,6-4-1 0 0,0-3-1153 0 0</inkml:trace>
+</inkml:ink>
+</file>
+
+<file path=ppt/ink/ink37.xml><?xml version="1.0" encoding="utf-8"?>
+<inkml:ink xmlns:inkml="http://www.w3.org/2003/InkML">
+  <inkml:definitions>
+    <inkml:context xml:id="ctx0">
+      <inkml:inkSource xml:id="inkSrc0">
+        <inkml:traceFormat>
+          <inkml:channel name="X" type="integer" min="-2.14748E9" max="2.14748E9" units="cm"/>
+          <inkml:channel name="Y" type="integer" min="-2.14748E9" max="2.14748E9" units="cm"/>
+          <inkml:channel name="F" type="integer" max="32767" units="dev"/>
+          <inkml:channel name="OA" type="integer" max="360" units="deg"/>
+          <inkml:channel name="OE" type="integer" max="90" units="deg"/>
+        </inkml:traceFormat>
+        <inkml:channelProperties>
+          <inkml:channelProperty channel="X" name="resolution" value="1000" units="1/cm"/>
+          <inkml:channelProperty channel="Y" name="resolution" value="1000" units="1/cm"/>
+          <inkml:channelProperty channel="F" name="resolution" value="0" units="1/dev"/>
+          <inkml:channelProperty channel="OA" name="resolution" value="1000" units="1/deg"/>
+          <inkml:channelProperty channel="OE" name="resolution" value="1000" units="1/deg"/>
+        </inkml:channelProperties>
+      </inkml:inkSource>
+      <inkml:timestamp xml:id="ts0" timeString="2026-05-19T06:25:22.339"/>
+    </inkml:context>
+    <inkml:brush xml:id="br0">
+      <inkml:brushProperty name="width" value="0.1" units="cm"/>
+      <inkml:brushProperty name="height" value="0.1" units="cm"/>
+      <inkml:brushProperty name="color" value="#FFC114"/>
+    </inkml:brush>
+  </inkml:definitions>
+  <inkml:trace contextRef="#ctx0" brushRef="#br0">290 0 4296 0 0,'0'0'107'0'0,"-5"1"-42"0"0,-15 2 4 0 0,15-2-8 0 0,-17 7 106 0 0,7-3-135 0 0,-1 1 0 0 0,1 1 0 0 0,0 0 0 0 0,1 0 0 0 0,0 2 0 0 0,0 0 0 0 0,1 0 0 0 0,-20 19 0 0 0,31-27-41 0 0,0 6-2 0 0,0 6-70 0 0,2-11 80 0 0,1-1-1 0 0,0 0 1 0 0,-1 0-1 0 0,1 0 0 0 0,0 0 1 0 0,0 0-1 0 0,0 0 1 0 0,0 0-1 0 0,0 0 0 0 0,0 0 1 0 0,0 0-1 0 0,1-1 1 0 0,-1 1-1 0 0,0 0 0 0 0,0-1 1 0 0,3 2-1 0 0,14 4 8 0 0,1-1-1 0 0,-1 0 1 0 0,1-1-1 0 0,21 1 0 0 0,-23-3-3 0 0,0 0-1 0 0,0 2 0 0 0,32 10 1 0 0,-25-5 39 0 0,-17-7 15 0 0,0 1 1 0 0,-1 0 0 0 0,1 0 0 0 0,-1 0-1 0 0,1 1 1 0 0,7 6 0 0 0,-13-10 65 0 0,-1 1-89 0 0,0 0 0 0 0,0-1 1 0 0,0 1-1 0 0,1-1 0 0 0,-1 1 0 0 0,0 0 1 0 0,0-1-1 0 0,0 1 0 0 0,0-1 0 0 0,0 1 1 0 0,0 0-1 0 0,0-1 0 0 0,0 1 0 0 0,-1-1 1 0 0,1 1-1 0 0,0 0 0 0 0,0-1 0 0 0,0 1 1 0 0,-1-1-1 0 0,1 1 0 0 0,0-1 0 0 0,-1 1 1 0 0,1-1-1 0 0,0 1 0 0 0,-1-1 0 0 0,1 1 1 0 0,-1-1-1 0 0,1 1 0 0 0,-1 0 0 0 0,-24 13 528 0 0,-34 4 38 0 0,54-16-484 0 0,-48 9 860 0 0,-82 7 0 0 0,63-10-303 0 0,69-8-636 0 0,-10-1-97 0 0,12 1-126 0 0,0 0-1 0 0,-1 0 1 0 0,1 0 0 0 0,0 0 0 0 0,0 0-1 0 0,0 0 1 0 0,0 0 0 0 0,0 0-1 0 0,0 0 1 0 0,0 0 0 0 0,0 0 0 0 0,0-1-1 0 0,0 1 1 0 0,0 0 0 0 0,0-1-1 0 0,0 1 1 0 0,0-1 0 0 0,0 1-1 0 0,0-1 1 0 0,-1-1 0 0 0,0-6-1982 0 0</inkml:trace>
+</inkml:ink>
+</file>
+
+<file path=ppt/ink/ink38.xml><?xml version="1.0" encoding="utf-8"?>
+<inkml:ink xmlns:inkml="http://www.w3.org/2003/InkML">
+  <inkml:definitions>
+    <inkml:context xml:id="ctx0">
+      <inkml:inkSource xml:id="inkSrc0">
+        <inkml:traceFormat>
+          <inkml:channel name="X" type="integer" min="-2.14748E9" max="2.14748E9" units="cm"/>
+          <inkml:channel name="Y" type="integer" min="-2.14748E9" max="2.14748E9" units="cm"/>
+          <inkml:channel name="F" type="integer" max="32767" units="dev"/>
+          <inkml:channel name="OA" type="integer" max="360" units="deg"/>
+          <inkml:channel name="OE" type="integer" max="90" units="deg"/>
+        </inkml:traceFormat>
+        <inkml:channelProperties>
+          <inkml:channelProperty channel="X" name="resolution" value="1000" units="1/cm"/>
+          <inkml:channelProperty channel="Y" name="resolution" value="1000" units="1/cm"/>
+          <inkml:channelProperty channel="F" name="resolution" value="0" units="1/dev"/>
+          <inkml:channelProperty channel="OA" name="resolution" value="1000" units="1/deg"/>
+          <inkml:channelProperty channel="OE" name="resolution" value="1000" units="1/deg"/>
+        </inkml:channelProperties>
+      </inkml:inkSource>
+      <inkml:timestamp xml:id="ts0" timeString="2026-05-19T06:25:18.890"/>
+    </inkml:context>
+    <inkml:brush xml:id="br0">
+      <inkml:brushProperty name="width" value="0.1" units="cm"/>
+      <inkml:brushProperty name="height" value="0.1" units="cm"/>
+      <inkml:brushProperty name="color" value="#FFC114"/>
+    </inkml:brush>
+  </inkml:definitions>
+  <inkml:trace contextRef="#ctx0" brushRef="#br0">11 40 5749 0 0,'0'0'-250'0'0,"-11"-40"4599"0"0,13 42-4348 0 0,0-1 0 0 0,0 0 0 0 0,0 1 0 0 0,0-1 0 0 0,0 1 0 0 0,-1 0 1 0 0,1-1-1 0 0,0 1 0 0 0,-1 0 0 0 0,2 3 0 0 0,-2-3 1 0 0,191 222 66 0 0,-148-179-56 0 0,3-1 0 0 0,64 46-1 0 0,111 61 36 0 0,-10-9-21 0 0,-207-138-25 0 0,373 259 72 0 0,-129-87-141 0 0,-86-56 156 0 0,235 144-16 0 0,-236-131 84 0 0,-162-133-108 0 0,12 11-1269 0 0,-15-16 688 0 0,2 3 225 0 0,0 1 0 0 0,0-1 0 0 0,0 0 0 0 0,0 0 0 0 0,0 0 0 0 0,1 0 0 0 0,-1 0 0 0 0,1 1 0 0 0,-1-1 0 0 0,1 0 0 0 0,-1-4 0 0 0</inkml:trace>
+</inkml:ink>
+</file>
+
+<file path=ppt/ink/ink39.xml><?xml version="1.0" encoding="utf-8"?>
+<inkml:ink xmlns:inkml="http://www.w3.org/2003/InkML">
+  <inkml:definitions>
+    <inkml:context xml:id="ctx0">
+      <inkml:inkSource xml:id="inkSrc0">
+        <inkml:traceFormat>
+          <inkml:channel name="X" type="integer" min="-2.14748E9" max="2.14748E9" units="cm"/>
+          <inkml:channel name="Y" type="integer" min="-2.14748E9" max="2.14748E9" units="cm"/>
+          <inkml:channel name="F" type="integer" max="32767" units="dev"/>
+          <inkml:channel name="OA" type="integer" max="360" units="deg"/>
+          <inkml:channel name="OE" type="integer" max="90" units="deg"/>
+        </inkml:traceFormat>
+        <inkml:channelProperties>
+          <inkml:channelProperty channel="X" name="resolution" value="1000" units="1/cm"/>
+          <inkml:channelProperty channel="Y" name="resolution" value="1000" units="1/cm"/>
+          <inkml:channelProperty channel="F" name="resolution" value="0" units="1/dev"/>
+          <inkml:channelProperty channel="OA" name="resolution" value="1000" units="1/deg"/>
+          <inkml:channelProperty channel="OE" name="resolution" value="1000" units="1/deg"/>
+        </inkml:channelProperties>
+      </inkml:inkSource>
+      <inkml:timestamp xml:id="ts0" timeString="2026-05-19T06:25:19.408"/>
+    </inkml:context>
+    <inkml:brush xml:id="br0">
+      <inkml:brushProperty name="width" value="0.1" units="cm"/>
+      <inkml:brushProperty name="height" value="0.1" units="cm"/>
+      <inkml:brushProperty name="color" value="#FFC114"/>
+    </inkml:brush>
+  </inkml:definitions>
+  <inkml:trace contextRef="#ctx0" brushRef="#br0">763 172 6493 0 0,'-8'-19'126'0'0,"0"1"0"0"0,-1 0 0 0 0,-1 0 0 0 0,-1 1 0 0 0,-23-29 0 0 0,24 33 612 0 0,9 12-467 0 0,-9-13 517 0 0,4 7-258 0 0,4 8 152 0 0,6 15-669 0 0,2 1-1 0 0,0-1 1 0 0,1-1-1 0 0,0 1 1 0 0,1-1-1 0 0,1 0 1 0 0,0-1-1 0 0,15 18 1 0 0,23 36 38 0 0,-46-66-40 0 0,1 1 1 0 0,-1-1 0 0 0,0 1 0 0 0,0 0 0 0 0,0-1 0 0 0,0 1-1 0 0,0 0 1 0 0,0 0 0 0 0,-1 0 0 0 0,1-1 0 0 0,-1 1-1 0 0,0 0 1 0 0,0 0 0 0 0,0 0 0 0 0,0 0 0 0 0,-1 0-1 0 0,1-1 1 0 0,-1 1 0 0 0,-1 3 0 0 0,0-1 12 0 0,0 0-1 0 0,-1-1 1 0 0,1 1 0 0 0,-1-1-1 0 0,0 1 1 0 0,-1-1 0 0 0,1 0 0 0 0,-1 0-1 0 0,-7 6 1 0 0,-8 4 62 0 0,-1 0 0 0 0,0-2 1 0 0,-38 18-1 0 0,38-20-54 0 0,-45 20 110 0 0,-1-2 0 0 0,-83 23 0 0 0,-143 22 370 0 0,290-72-562 0 0,1-1 0 0 0,-1 1 0 0 0,0-1 0 0 0,1 0 0 0 0,-1 1 0 0 0,0-1 0 0 0,0 0 0 0 0,1 0-1 0 0,-1 0 1 0 0,0 0 0 0 0,0 0 0 0 0,1-1 0 0 0,-1 1 0 0 0,0 0 0 0 0,0-1 0 0 0,1 1 0 0 0,-1-1-1 0 0,0 0 1 0 0,1 0 0 0 0,-1 0 0 0 0,-2-1 0 0 0,4 0-63 0 0,-1 1 1 0 0,1 0-1 0 0,0 0 1 0 0,0 0-1 0 0,0 0 0 0 0,0-1 1 0 0,0 1-1 0 0,0 0 1 0 0,0 0-1 0 0,0 0 0 0 0,0-1 1 0 0,1 1-1 0 0,-1 0 0 0 0,0 0 1 0 0,1 0-1 0 0,-1 0 1 0 0,1 0-1 0 0,-1 0 0 0 0,1 0 1 0 0,0 0-1 0 0,-1 0 1 0 0,1 0-1 0 0,0 0 0 0 0,0 0 1 0 0,-1 0-1 0 0,1 0 1 0 0,0 1-1 0 0,0-1 0 0 0,0 0 1 0 0,0 1-1 0 0,0-1 1 0 0,1 0-1 0 0,19-16-2417 0 0,1 0-476 0 0</inkml:trace>
+</inkml:ink>
+</file>
+
 <file path=ppt/ink/ink4.xml><?xml version="1.0" encoding="utf-8"?>
 <inkml:ink xmlns:inkml="http://www.w3.org/2003/InkML">
   <inkml:definitions>
@@ -861,6 +1405,70 @@
     </inkml:brush>
   </inkml:definitions>
   <inkml:trace contextRef="#ctx0" brushRef="#br0">38 191 6841 0 0,'-25'-63'812'0'0,"25"62"-547"0"0,-5-3-47 0 0,-3-1 784 0 0,13 30-1026 0 0,1 0 1 0 0,1 0 0 0 0,1 0 0 0 0,1-1 0 0 0,1 0 0 0 0,1 0 0 0 0,1-2 0 0 0,1 1 0 0 0,1-2 0 0 0,20 24 0 0 0,-23-31 23 0 0,1-1 0 0 0,1 0 0 0 0,0-1 1 0 0,1 0-1 0 0,0-1 0 0 0,1-1 0 0 0,0 0 0 0 0,1-1 0 0 0,0 0 0 0 0,0-2 0 0 0,1 0 1 0 0,0-1-1 0 0,0 0 0 0 0,0-1 0 0 0,31 4 0 0 0,-28-7 11 0 0,0-1 1 0 0,0 0-1 0 0,0-1 0 0 0,0-1 1 0 0,0-1-1 0 0,0-1 0 0 0,0-1 1 0 0,-1-1-1 0 0,0 0 0 0 0,0-2 1 0 0,0 0-1 0 0,0-1 0 0 0,-1 0 1 0 0,-1-2-1 0 0,1 0 0 0 0,-2-1 1 0 0,1-1-1 0 0,-2 0 1 0 0,0-1-1 0 0,0-1 0 0 0,-1 0 1 0 0,-1-1-1 0 0,0-1 0 0 0,-1 0 1 0 0,-1-1-1 0 0,0 0 0 0 0,-1 0 1 0 0,-1-1-1 0 0,8-24 0 0 0,-7 16 354 0 0,-2 1 0 0 0,-1-1 0 0 0,-1-1 0 0 0,-1 1 0 0 0,-1-1 0 0 0,0-28 0 0 0,-4 53-370 0 0,-11-29-5194 0 0,9 23 2980 0 0</inkml:trace>
+</inkml:ink>
+</file>
+
+<file path=ppt/ink/ink40.xml><?xml version="1.0" encoding="utf-8"?>
+<inkml:ink xmlns:inkml="http://www.w3.org/2003/InkML">
+  <inkml:definitions>
+    <inkml:context xml:id="ctx0">
+      <inkml:inkSource xml:id="inkSrc0">
+        <inkml:traceFormat>
+          <inkml:channel name="X" type="integer" min="-2.14748E9" max="2.14748E9" units="cm"/>
+          <inkml:channel name="Y" type="integer" min="-2.14748E9" max="2.14748E9" units="cm"/>
+          <inkml:channel name="F" type="integer" max="32767" units="dev"/>
+          <inkml:channel name="OA" type="integer" max="360" units="deg"/>
+          <inkml:channel name="OE" type="integer" max="90" units="deg"/>
+        </inkml:traceFormat>
+        <inkml:channelProperties>
+          <inkml:channelProperty channel="X" name="resolution" value="1000" units="1/cm"/>
+          <inkml:channelProperty channel="Y" name="resolution" value="1000" units="1/cm"/>
+          <inkml:channelProperty channel="F" name="resolution" value="0" units="1/dev"/>
+          <inkml:channelProperty channel="OA" name="resolution" value="1000" units="1/deg"/>
+          <inkml:channelProperty channel="OE" name="resolution" value="1000" units="1/deg"/>
+        </inkml:channelProperties>
+      </inkml:inkSource>
+      <inkml:timestamp xml:id="ts0" timeString="2026-05-19T06:25:25.054"/>
+    </inkml:context>
+    <inkml:brush xml:id="br0">
+      <inkml:brushProperty name="width" value="0.1" units="cm"/>
+      <inkml:brushProperty name="height" value="0.1" units="cm"/>
+      <inkml:brushProperty name="color" value="#FFC114"/>
+    </inkml:brush>
+  </inkml:definitions>
+  <inkml:trace contextRef="#ctx0" brushRef="#br0">55 136 5809 0 0,'-18'-28'-94'0'0,"11"9"821"0"0,-3 13-240 0 0,9 6-484 0 0,0 0 0 0 0,0 1 0 0 0,0-1 0 0 0,1 1-1 0 0,-1-1 1 0 0,0 1 0 0 0,0 0 0 0 0,1-1 0 0 0,-1 1-1 0 0,1 0 1 0 0,-1-1 0 0 0,0 1 0 0 0,1 0 0 0 0,-1 0-1 0 0,1 0 1 0 0,0-1 0 0 0,-1 1 0 0 0,1 0 0 0 0,-1 1-1 0 0,-1 7 18 0 0,0-1-1 0 0,1 1 0 0 0,0 0 1 0 0,1 0-1 0 0,0-1 0 0 0,0 1 1 0 0,1 0-1 0 0,0-1 0 0 0,0 1 1 0 0,1 0-1 0 0,3 11 0 0 0,63 197 3268 0 0,-70-243-2890 0 0,-5-33-26 0 0,-2 0 0 0 0,-21-69-1 0 0,18 82-243 0 0,-2-17-34 0 0,14 62-89 0 0,0-1-1 0 0,-1 1-15 0 0,1 0 0 0 0,0 0-1 0 0,0 0 1 0 0,-1 0 0 0 0,1 0-1 0 0,0 0 1 0 0,0 0 0 0 0,0 0-1 0 0,0 0 1 0 0,0 0 0 0 0,0 0-1 0 0,0 0 1 0 0,0 0 0 0 0,0 0-1 0 0,1 0 1 0 0,-1 1-1 0 0,0-1 1 0 0,1 0 0 0 0,0-2-1 0 0,13 6-59 0 0,25 32 107 0 0,-30-26-68 0 0,189 155 13 0 0,-168-142 34 0 0,1-2 1 0 0,1-1 0 0 0,1-2 0 0 0,65 25 0 0 0,37 4 208 0 0,-132-45 66 0 0,0-3-198 0 0,-2 1-78 0 0,0 0-1 0 0,1 0 1 0 0,-1 0-1 0 0,0 0 1 0 0,-1 0-1 0 0,1 0 1 0 0,0-1-1 0 0,0 1 1 0 0,0 0-1 0 0,-1-1 1 0 0,1 1-1 0 0,-1-1 0 0 0,1 1 1 0 0,-1-1-1 0 0,1 1 1 0 0,-1-1-1 0 0,0 1 1 0 0,0-1-1 0 0,0 1 1 0 0,0-1-1 0 0,0 1 1 0 0,0-1-1 0 0,0 1 1 0 0,0-1-1 0 0,-1 1 0 0 0,1-1 1 0 0,-1 1-1 0 0,1-1 1 0 0,-2-1-1 0 0,-23-61 132 0 0,11 32-94 0 0,-45-152 101 0 0,56 173-185 0 0,-1 1-1 0 0,0 0 0 0 0,-1 0 1 0 0,0 0-1 0 0,-11-15 0 0 0,16 24 26 0 0,-10 8-2281 0 0,5-2 484 0 0</inkml:trace>
+</inkml:ink>
+</file>
+
+<file path=ppt/ink/ink41.xml><?xml version="1.0" encoding="utf-8"?>
+<inkml:ink xmlns:inkml="http://www.w3.org/2003/InkML">
+  <inkml:definitions>
+    <inkml:context xml:id="ctx0">
+      <inkml:inkSource xml:id="inkSrc0">
+        <inkml:traceFormat>
+          <inkml:channel name="X" type="integer" min="-2.14748E9" max="2.14748E9" units="cm"/>
+          <inkml:channel name="Y" type="integer" min="-2.14748E9" max="2.14748E9" units="cm"/>
+          <inkml:channel name="F" type="integer" max="32767" units="dev"/>
+          <inkml:channel name="OA" type="integer" max="360" units="deg"/>
+          <inkml:channel name="OE" type="integer" max="90" units="deg"/>
+        </inkml:traceFormat>
+        <inkml:channelProperties>
+          <inkml:channelProperty channel="X" name="resolution" value="1000" units="1/cm"/>
+          <inkml:channelProperty channel="Y" name="resolution" value="1000" units="1/cm"/>
+          <inkml:channelProperty channel="F" name="resolution" value="0" units="1/dev"/>
+          <inkml:channelProperty channel="OA" name="resolution" value="1000" units="1/deg"/>
+          <inkml:channelProperty channel="OE" name="resolution" value="1000" units="1/deg"/>
+        </inkml:channelProperties>
+      </inkml:inkSource>
+      <inkml:timestamp xml:id="ts0" timeString="2026-05-19T06:25:25.647"/>
+    </inkml:context>
+    <inkml:brush xml:id="br0">
+      <inkml:brushProperty name="width" value="0.1" units="cm"/>
+      <inkml:brushProperty name="height" value="0.1" units="cm"/>
+      <inkml:brushProperty name="color" value="#FFC114"/>
+    </inkml:brush>
+  </inkml:definitions>
+  <inkml:trace contextRef="#ctx0" brushRef="#br0">100 45 5689 0 0,'-7'-14'142'0'0,"6"13"-111"0"0,-1 0-1 0 0,1 0 0 0 0,0 0 1 0 0,-1 0-1 0 0,1 0 0 0 0,-1 0 1 0 0,1 0-1 0 0,-1 1 1 0 0,1-1-1 0 0,-1 1 0 0 0,1-1 1 0 0,-1 1-1 0 0,0 0 0 0 0,1-1 1 0 0,-1 1-1 0 0,0 0 1 0 0,1 0-1 0 0,-1 0 0 0 0,0 0 1 0 0,1 0-1 0 0,-1 1 0 0 0,0-1 1 0 0,1 1-1 0 0,-1-1 1 0 0,1 1-1 0 0,-1-1 0 0 0,1 1 1 0 0,-1 0-1 0 0,1-1 0 0 0,-1 1 1 0 0,1 0-1 0 0,0 0 1 0 0,-2 2-1 0 0,-1 0-27 0 0,0 1 1 0 0,0 0-1 0 0,1 0 0 0 0,0 0 1 0 0,0 0-1 0 0,0 0 0 0 0,0 1 1 0 0,1-1-1 0 0,-4 10 0 0 0,5-12-6 0 0,1 0-1 0 0,0 0 0 0 0,-1 0 1 0 0,1 0-1 0 0,0 0 0 0 0,1 0 0 0 0,-1 0 1 0 0,0 0-1 0 0,0 0 0 0 0,1 0 1 0 0,-1 0-1 0 0,1 0 0 0 0,0 0 1 0 0,0 0-1 0 0,0 0 0 0 0,0-1 1 0 0,0 1-1 0 0,0 0 0 0 0,0 0 0 0 0,0-1 1 0 0,1 1-1 0 0,-1-1 0 0 0,3 3 1 0 0,1 1 3 0 0,0-1-1 0 0,0 1 1 0 0,1-1 0 0 0,-1 0 0 0 0,10 4 0 0 0,-2-3 46 0 0,-1 0 0 0 0,1-1 1 0 0,0-1-1 0 0,0 0 0 0 0,0-1 0 0 0,0-1 0 0 0,0 0 1 0 0,25-1-1 0 0,-31 0 19 0 0,-1-1 1 0 0,1 0 0 0 0,-1 0-1 0 0,0-1 1 0 0,0 1-1 0 0,0-1 1 0 0,0-1-1 0 0,0 1 1 0 0,7-5 0 0 0,-10 5-21 0 0,-1 0 1 0 0,1 1 0 0 0,-1-1-1 0 0,0-1 1 0 0,0 1 0 0 0,0 0-1 0 0,0-1 1 0 0,0 1 0 0 0,0-1 0 0 0,0 1-1 0 0,-1-1 1 0 0,1 0 0 0 0,-1 0-1 0 0,0 0 1 0 0,0 0 0 0 0,0 0-1 0 0,0 0 1 0 0,-1 0 0 0 0,1-4-1 0 0,0 4-5 0 0,-1 0 0 0 0,0-1 0 0 0,0 1 0 0 0,0 0 0 0 0,-1 0-1 0 0,1 0 1 0 0,-1 0 0 0 0,1 0 0 0 0,-1-1 0 0 0,0 1-1 0 0,0 0 1 0 0,-1 1 0 0 0,1-1 0 0 0,-1 0 0 0 0,1 0-1 0 0,-1 1 1 0 0,0-1 0 0 0,0 0 0 0 0,-3-2 0 0 0,0 1 6 0 0,1 0 0 0 0,-1 0 0 0 0,-1 1-1 0 0,1 0 1 0 0,0 0 0 0 0,-1 0 0 0 0,0 1 0 0 0,1 0 0 0 0,-10-3 0 0 0,-2 1 18 0 0,0 1-1 0 0,0 1 1 0 0,0 0-1 0 0,-1 1 1 0 0,1 1-1 0 0,-21 3 1 0 0,-43 14-2405 0 0</inkml:trace>
 </inkml:ink>
 </file>
 
@@ -1106,7 +1714,7 @@
           <a:p>
             <a:fld id="{CB233BD1-3BA8-448D-9D08-7846095EA517}" type="datetimeFigureOut">
               <a:rPr lang="en-US" smtClean="0"/>
-              <a:t>4/30/2026</a:t>
+              <a:t>5/28/2026</a:t>
             </a:fld>
             <a:endParaRPr lang="en-US"/>
           </a:p>
@@ -1520,7 +2128,7 @@
           <a:p>
             <a:fld id="{6383FAE1-13DE-4511-8C1B-C8AFB720664C}" type="datetimeFigureOut">
               <a:rPr lang="en-US" smtClean="0"/>
-              <a:t>4/30/2026</a:t>
+              <a:t>5/28/2026</a:t>
             </a:fld>
             <a:endParaRPr lang="en-US"/>
           </a:p>
@@ -1718,7 +2326,7 @@
           <a:p>
             <a:fld id="{6383FAE1-13DE-4511-8C1B-C8AFB720664C}" type="datetimeFigureOut">
               <a:rPr lang="en-US" smtClean="0"/>
-              <a:t>4/30/2026</a:t>
+              <a:t>5/28/2026</a:t>
             </a:fld>
             <a:endParaRPr lang="en-US"/>
           </a:p>
@@ -1926,7 +2534,7 @@
           <a:p>
             <a:fld id="{6383FAE1-13DE-4511-8C1B-C8AFB720664C}" type="datetimeFigureOut">
               <a:rPr lang="en-US" smtClean="0"/>
-              <a:t>4/30/2026</a:t>
+              <a:t>5/28/2026</a:t>
             </a:fld>
             <a:endParaRPr lang="en-US"/>
           </a:p>
@@ -2124,7 +2732,7 @@
           <a:p>
             <a:fld id="{6383FAE1-13DE-4511-8C1B-C8AFB720664C}" type="datetimeFigureOut">
               <a:rPr lang="en-US" smtClean="0"/>
-              <a:t>4/30/2026</a:t>
+              <a:t>5/28/2026</a:t>
             </a:fld>
             <a:endParaRPr lang="en-US"/>
           </a:p>
@@ -2399,7 +3007,7 @@
           <a:p>
             <a:fld id="{6383FAE1-13DE-4511-8C1B-C8AFB720664C}" type="datetimeFigureOut">
               <a:rPr lang="en-US" smtClean="0"/>
-              <a:t>4/30/2026</a:t>
+              <a:t>5/28/2026</a:t>
             </a:fld>
             <a:endParaRPr lang="en-US"/>
           </a:p>
@@ -2664,7 +3272,7 @@
           <a:p>
             <a:fld id="{6383FAE1-13DE-4511-8C1B-C8AFB720664C}" type="datetimeFigureOut">
               <a:rPr lang="en-US" smtClean="0"/>
-              <a:t>4/30/2026</a:t>
+              <a:t>5/28/2026</a:t>
             </a:fld>
             <a:endParaRPr lang="en-US"/>
           </a:p>
@@ -3076,7 +3684,7 @@
           <a:p>
             <a:fld id="{6383FAE1-13DE-4511-8C1B-C8AFB720664C}" type="datetimeFigureOut">
               <a:rPr lang="en-US" smtClean="0"/>
-              <a:t>4/30/2026</a:t>
+              <a:t>5/28/2026</a:t>
             </a:fld>
             <a:endParaRPr lang="en-US"/>
           </a:p>
@@ -3217,7 +3825,7 @@
           <a:p>
             <a:fld id="{6383FAE1-13DE-4511-8C1B-C8AFB720664C}" type="datetimeFigureOut">
               <a:rPr lang="en-US" smtClean="0"/>
-              <a:t>4/30/2026</a:t>
+              <a:t>5/28/2026</a:t>
             </a:fld>
             <a:endParaRPr lang="en-US"/>
           </a:p>
@@ -3330,7 +3938,7 @@
           <a:p>
             <a:fld id="{6383FAE1-13DE-4511-8C1B-C8AFB720664C}" type="datetimeFigureOut">
               <a:rPr lang="en-US" smtClean="0"/>
-              <a:t>4/30/2026</a:t>
+              <a:t>5/28/2026</a:t>
             </a:fld>
             <a:endParaRPr lang="en-US"/>
           </a:p>
@@ -3641,7 +4249,7 @@
           <a:p>
             <a:fld id="{6383FAE1-13DE-4511-8C1B-C8AFB720664C}" type="datetimeFigureOut">
               <a:rPr lang="en-US" smtClean="0"/>
-              <a:t>4/30/2026</a:t>
+              <a:t>5/28/2026</a:t>
             </a:fld>
             <a:endParaRPr lang="en-US"/>
           </a:p>
@@ -3932,7 +4540,7 @@
           <a:p>
             <a:fld id="{6383FAE1-13DE-4511-8C1B-C8AFB720664C}" type="datetimeFigureOut">
               <a:rPr lang="en-US" smtClean="0"/>
-              <a:t>4/30/2026</a:t>
+              <a:t>5/28/2026</a:t>
             </a:fld>
             <a:endParaRPr lang="en-US"/>
           </a:p>
@@ -4176,7 +4784,7 @@
           <a:p>
             <a:fld id="{6383FAE1-13DE-4511-8C1B-C8AFB720664C}" type="datetimeFigureOut">
               <a:rPr lang="en-US" smtClean="0"/>
-              <a:t>4/30/2026</a:t>
+              <a:t>5/28/2026</a:t>
             </a:fld>
             <a:endParaRPr lang="en-US"/>
           </a:p>
@@ -7289,117 +7897,6 @@
         <p:cNvPr id="1" name="">
           <a:extLst>
             <a:ext uri="{FF2B5EF4-FFF2-40B4-BE49-F238E27FC236}">
-              <a16:creationId xmlns:a16="http://schemas.microsoft.com/office/drawing/2014/main" id="{DD931D7F-4279-DA2E-FA64-6CF3C441D414}"/>
-            </a:ext>
-          </a:extLst>
-        </p:cNvPr>
-        <p:cNvGrpSpPr/>
-        <p:nvPr/>
-      </p:nvGrpSpPr>
-      <p:grpSpPr>
-        <a:xfrm>
-          <a:off x="0" y="0"/>
-          <a:ext cx="0" cy="0"/>
-          <a:chOff x="0" y="0"/>
-          <a:chExt cx="0" cy="0"/>
-        </a:xfrm>
-      </p:grpSpPr>
-      <p:sp>
-        <p:nvSpPr>
-          <p:cNvPr id="3" name="TextBox 2">
-            <a:extLst>
-              <a:ext uri="{FF2B5EF4-FFF2-40B4-BE49-F238E27FC236}">
-                <a16:creationId xmlns:a16="http://schemas.microsoft.com/office/drawing/2014/main" id="{BE8FE74C-D6E6-A429-3A3E-88F200CB7208}"/>
-              </a:ext>
-            </a:extLst>
-          </p:cNvPr>
-          <p:cNvSpPr txBox="1"/>
-          <p:nvPr/>
-        </p:nvSpPr>
-        <p:spPr>
-          <a:xfrm>
-            <a:off x="192024" y="925915"/>
-            <a:ext cx="10213848" cy="470000"/>
-          </a:xfrm>
-          <a:prstGeom prst="rect">
-            <a:avLst/>
-          </a:prstGeom>
-          <a:noFill/>
-        </p:spPr>
-        <p:txBody>
-          <a:bodyPr wrap="square">
-            <a:spAutoFit/>
-          </a:bodyPr>
-          <a:lstStyle/>
-          <a:p>
-            <a:pPr marL="342900" marR="0" lvl="0" indent="-342900">
-              <a:lnSpc>
-                <a:spcPct val="107000"/>
-              </a:lnSpc>
-              <a:spcBef>
-                <a:spcPts val="750"/>
-              </a:spcBef>
-              <a:spcAft>
-                <a:spcPts val="800"/>
-              </a:spcAft>
-              <a:buSzPts val="1000"/>
-              <a:buFont typeface="Arial" panose="020B0604020202020204" pitchFamily="34" charset="0"/>
-              <a:buChar char="•"/>
-              <a:tabLst>
-                <a:tab pos="457200" algn="l"/>
-              </a:tabLst>
-            </a:pPr>
-            <a:r>
-              <a:rPr lang="en-IN" sz="2400" b="1" dirty="0">
-                <a:solidFill>
-                  <a:schemeClr val="accent6">
-                    <a:lumMod val="60000"/>
-                    <a:lumOff val="40000"/>
-                  </a:schemeClr>
-                </a:solidFill>
-                <a:effectLst/>
-                <a:latin typeface="Calibri" panose="020F0502020204030204" pitchFamily="34" charset="0"/>
-                <a:ea typeface="Times New Roman" panose="02020603050405020304" pitchFamily="18" charset="0"/>
-                <a:cs typeface="Calibri" panose="020F0502020204030204" pitchFamily="34" charset="0"/>
-              </a:rPr>
-              <a:t>1950s-1970s: Early AI programs, such as chess-playing programs, emerged</a:t>
-            </a:r>
-            <a:endParaRPr lang="en-US" sz="2400" dirty="0">
-              <a:solidFill>
-                <a:schemeClr val="accent6">
-                  <a:lumMod val="60000"/>
-                  <a:lumOff val="40000"/>
-                </a:schemeClr>
-              </a:solidFill>
-              <a:effectLst/>
-              <a:latin typeface="Calibri" panose="020F0502020204030204" pitchFamily="34" charset="0"/>
-              <a:ea typeface="Calibri" panose="020F0502020204030204" pitchFamily="34" charset="0"/>
-              <a:cs typeface="Times New Roman" panose="02020603050405020304" pitchFamily="18" charset="0"/>
-            </a:endParaRPr>
-          </a:p>
-        </p:txBody>
-      </p:sp>
-    </p:spTree>
-    <p:extLst>
-      <p:ext uri="{BB962C8B-B14F-4D97-AF65-F5344CB8AC3E}">
-        <p14:creationId xmlns:p14="http://schemas.microsoft.com/office/powerpoint/2010/main" val="366625378"/>
-      </p:ext>
-    </p:extLst>
-  </p:cSld>
-  <p:clrMapOvr>
-    <a:masterClrMapping/>
-  </p:clrMapOvr>
-</p:sld>
-</file>
-
-<file path=ppt/slides/slide4.xml><?xml version="1.0" encoding="utf-8"?>
-<p:sld xmlns:a="http://schemas.openxmlformats.org/drawingml/2006/main" xmlns:r="http://schemas.openxmlformats.org/officeDocument/2006/relationships" xmlns:p="http://schemas.openxmlformats.org/presentationml/2006/main">
-  <p:cSld>
-    <p:spTree>
-      <p:nvGrpSpPr>
-        <p:cNvPr id="1" name="">
-          <a:extLst>
-            <a:ext uri="{FF2B5EF4-FFF2-40B4-BE49-F238E27FC236}">
               <a16:creationId xmlns:a16="http://schemas.microsoft.com/office/drawing/2014/main" id="{60330B62-E7FC-0811-4749-71DE810CE9AE}"/>
             </a:ext>
           </a:extLst>
@@ -7430,7 +7927,7 @@
         <p:spPr>
           <a:xfrm>
             <a:off x="137160" y="386419"/>
-            <a:ext cx="10460736" cy="5632311"/>
+            <a:ext cx="7996451" cy="3785652"/>
           </a:xfrm>
           <a:prstGeom prst="rect">
             <a:avLst/>
@@ -7584,22 +8081,38 @@
               <a:t> built by humans with hand-coded rules.</a:t>
             </a:r>
           </a:p>
-          <a:p>
-            <a:r>
-              <a:rPr lang="en-US" sz="2400" dirty="0">
-                <a:solidFill>
-                  <a:schemeClr val="accent6">
-                    <a:lumMod val="60000"/>
-                    <a:lumOff val="40000"/>
-                  </a:schemeClr>
-                </a:solidFill>
-              </a:rPr>
-              <a:t> </a:t>
-            </a:r>
-          </a:p>
-          <a:p>
-            <a:r>
-              <a:rPr lang="en-US" sz="2400" b="1" dirty="0">
+        </p:txBody>
+      </p:sp>
+      <p:sp>
+        <p:nvSpPr>
+          <p:cNvPr id="10" name="TextBox 9">
+            <a:extLst>
+              <a:ext uri="{FF2B5EF4-FFF2-40B4-BE49-F238E27FC236}">
+                <a16:creationId xmlns:a16="http://schemas.microsoft.com/office/drawing/2014/main" id="{E6DFBB58-24C3-9746-4505-D5EDF6AA1DE3}"/>
+              </a:ext>
+            </a:extLst>
+          </p:cNvPr>
+          <p:cNvSpPr txBox="1"/>
+          <p:nvPr/>
+        </p:nvSpPr>
+        <p:spPr>
+          <a:xfrm>
+            <a:off x="137160" y="4599432"/>
+            <a:ext cx="9290304" cy="1938992"/>
+          </a:xfrm>
+          <a:prstGeom prst="rect">
+            <a:avLst/>
+          </a:prstGeom>
+          <a:noFill/>
+        </p:spPr>
+        <p:txBody>
+          <a:bodyPr wrap="square">
+            <a:spAutoFit/>
+          </a:bodyPr>
+          <a:lstStyle/>
+          <a:p>
+            <a:r>
+              <a:rPr lang="en-US" sz="2000" b="1" dirty="0">
                 <a:solidFill>
                   <a:schemeClr val="accent6">
                     <a:lumMod val="60000"/>
@@ -7609,7 +8122,7 @@
               </a:rPr>
               <a:t>Example:</a:t>
             </a:r>
-            <a:endParaRPr lang="en-US" sz="2400" dirty="0">
+            <a:endParaRPr lang="en-US" sz="2000" dirty="0">
               <a:solidFill>
                 <a:schemeClr val="accent6">
                   <a:lumMod val="60000"/>
@@ -7621,7 +8134,7 @@
           <a:p>
             <a:pPr lvl="0"/>
             <a:r>
-              <a:rPr lang="en-US" sz="2400" dirty="0">
+              <a:rPr lang="en-US" sz="2000" dirty="0">
                 <a:solidFill>
                   <a:schemeClr val="accent6">
                     <a:lumMod val="60000"/>
@@ -7634,7 +8147,7 @@
           </a:p>
           <a:p>
             <a:pPr lvl="0"/>
-            <a:endParaRPr lang="en-US" sz="2400" dirty="0">
+            <a:endParaRPr lang="en-US" sz="2000" dirty="0">
               <a:solidFill>
                 <a:schemeClr val="accent6">
                   <a:lumMod val="60000"/>
@@ -7645,7 +8158,7 @@
           </a:p>
           <a:p>
             <a:r>
-              <a:rPr lang="en-US" sz="2400" dirty="0">
+              <a:rPr lang="en-US" sz="2000" dirty="0">
                 <a:solidFill>
                   <a:schemeClr val="accent6">
                     <a:lumMod val="60000"/>
@@ -7653,10 +8166,10 @@
                   </a:schemeClr>
                 </a:solidFill>
               </a:rPr>
-              <a:t>If ( fever, </a:t>
-            </a:r>
-            <a:r>
-              <a:rPr lang="en-US" sz="2400" dirty="0" err="1">
+              <a:t>If ( fever=True, </a:t>
+            </a:r>
+            <a:r>
+              <a:rPr lang="en-US" sz="2000" dirty="0" err="1">
                 <a:solidFill>
                   <a:schemeClr val="accent6">
                     <a:lumMod val="60000"/>
@@ -7667,7 +8180,7 @@
               <a:t>blood_marker_number</a:t>
             </a:r>
             <a:r>
-              <a:rPr lang="en-US" sz="2400" dirty="0">
+              <a:rPr lang="en-US" sz="2000" dirty="0">
                 <a:solidFill>
                   <a:schemeClr val="accent6">
                     <a:lumMod val="60000"/>
@@ -7678,7 +8191,7 @@
               <a:t> &gt; 40, </a:t>
             </a:r>
             <a:r>
-              <a:rPr lang="en-US" sz="2400" dirty="0" err="1">
+              <a:rPr lang="en-US" sz="2000" dirty="0" err="1">
                 <a:solidFill>
                   <a:schemeClr val="accent6">
                     <a:lumMod val="60000"/>
@@ -7689,7 +8202,7 @@
               <a:t>rash_size</a:t>
             </a:r>
             <a:r>
-              <a:rPr lang="en-US" sz="2400" dirty="0">
+              <a:rPr lang="en-US" sz="2000" dirty="0">
                 <a:solidFill>
                   <a:schemeClr val="accent6">
                     <a:lumMod val="60000"/>
@@ -7700,7 +8213,7 @@
               <a:t> &gt; 20 mm):  then </a:t>
             </a:r>
             <a:r>
-              <a:rPr lang="en-US" sz="2400" dirty="0" err="1">
+              <a:rPr lang="en-US" sz="2000" dirty="0" err="1">
                 <a:solidFill>
                   <a:schemeClr val="accent6">
                     <a:lumMod val="60000"/>
@@ -7710,7 +8223,7 @@
               </a:rPr>
               <a:t>skin_cancer</a:t>
             </a:r>
-            <a:endParaRPr lang="en-US" sz="2400" dirty="0">
+            <a:endParaRPr lang="en-US" sz="2000" dirty="0">
               <a:solidFill>
                 <a:schemeClr val="accent6">
                   <a:lumMod val="60000"/>
@@ -7721,7 +8234,7 @@
           </a:p>
           <a:p>
             <a:r>
-              <a:rPr lang="en-US" sz="2400" dirty="0">
+              <a:rPr lang="en-US" sz="2000" dirty="0">
                 <a:solidFill>
                   <a:schemeClr val="accent6">
                     <a:lumMod val="60000"/>
@@ -7734,12 +8247,48 @@
           </a:p>
         </p:txBody>
       </p:sp>
+    </p:spTree>
+    <p:extLst>
+      <p:ext uri="{BB962C8B-B14F-4D97-AF65-F5344CB8AC3E}">
+        <p14:creationId xmlns:p14="http://schemas.microsoft.com/office/powerpoint/2010/main" val="2306991871"/>
+      </p:ext>
+    </p:extLst>
+  </p:cSld>
+  <p:clrMapOvr>
+    <a:masterClrMapping/>
+  </p:clrMapOvr>
+</p:sld>
+</file>
+
+<file path=ppt/slides/slide4.xml><?xml version="1.0" encoding="utf-8"?>
+<p:sld xmlns:a="http://schemas.openxmlformats.org/drawingml/2006/main" xmlns:r="http://schemas.openxmlformats.org/officeDocument/2006/relationships" xmlns:p="http://schemas.openxmlformats.org/presentationml/2006/main">
+  <p:cSld>
+    <p:spTree>
+      <p:nvGrpSpPr>
+        <p:cNvPr id="1" name="">
+          <a:extLst>
+            <a:ext uri="{FF2B5EF4-FFF2-40B4-BE49-F238E27FC236}">
+              <a16:creationId xmlns:a16="http://schemas.microsoft.com/office/drawing/2014/main" id="{633E999C-5BE9-ED96-1740-70C593B12B40}"/>
+            </a:ext>
+          </a:extLst>
+        </p:cNvPr>
+        <p:cNvGrpSpPr/>
+        <p:nvPr/>
+      </p:nvGrpSpPr>
+      <p:grpSpPr>
+        <a:xfrm>
+          <a:off x="0" y="0"/>
+          <a:ext cx="0" cy="0"/>
+          <a:chOff x="0" y="0"/>
+          <a:chExt cx="0" cy="0"/>
+        </a:xfrm>
+      </p:grpSpPr>
       <p:sp>
         <p:nvSpPr>
           <p:cNvPr id="2" name="Oval 1">
             <a:extLst>
               <a:ext uri="{FF2B5EF4-FFF2-40B4-BE49-F238E27FC236}">
-                <a16:creationId xmlns:a16="http://schemas.microsoft.com/office/drawing/2014/main" id="{C0EBAD3F-CE3C-1942-3C5A-ECECA185272A}"/>
+                <a16:creationId xmlns:a16="http://schemas.microsoft.com/office/drawing/2014/main" id="{CB250222-9479-836C-D2AE-ECB8A555B43B}"/>
               </a:ext>
             </a:extLst>
           </p:cNvPr>
@@ -7748,7 +8297,7 @@
         </p:nvSpPr>
         <p:spPr>
           <a:xfrm>
-            <a:off x="9601200" y="850392"/>
+            <a:off x="3828668" y="329184"/>
             <a:ext cx="1280160" cy="676656"/>
           </a:xfrm>
           <a:prstGeom prst="ellipse">
@@ -7788,7 +8337,7 @@
           <p:cNvPr id="4" name="Oval 3">
             <a:extLst>
               <a:ext uri="{FF2B5EF4-FFF2-40B4-BE49-F238E27FC236}">
-                <a16:creationId xmlns:a16="http://schemas.microsoft.com/office/drawing/2014/main" id="{D9EC95A8-CA98-3196-5273-D714249FB580}"/>
+                <a16:creationId xmlns:a16="http://schemas.microsoft.com/office/drawing/2014/main" id="{F302435D-9406-D5B6-0805-E0D1F4811C8B}"/>
               </a:ext>
             </a:extLst>
           </p:cNvPr>
@@ -7797,8 +8346,8 @@
         </p:nvSpPr>
         <p:spPr>
           <a:xfrm>
-            <a:off x="9029700" y="1743456"/>
-            <a:ext cx="1124712" cy="676656"/>
+            <a:off x="1293549" y="1841485"/>
+            <a:ext cx="1919827" cy="676656"/>
           </a:xfrm>
           <a:prstGeom prst="ellipse">
             <a:avLst/>
@@ -7827,7 +8376,7 @@
             <a:pPr algn="ctr"/>
             <a:r>
               <a:rPr lang="en-US" dirty="0"/>
-              <a:t>steps</a:t>
+              <a:t>Steps walk ?</a:t>
             </a:r>
           </a:p>
         </p:txBody>
@@ -7837,7 +8386,7 @@
           <p:cNvPr id="5" name="Oval 4">
             <a:extLst>
               <a:ext uri="{FF2B5EF4-FFF2-40B4-BE49-F238E27FC236}">
-                <a16:creationId xmlns:a16="http://schemas.microsoft.com/office/drawing/2014/main" id="{E97A8ED8-D851-C80D-7D2A-EE060DCEC25D}"/>
+                <a16:creationId xmlns:a16="http://schemas.microsoft.com/office/drawing/2014/main" id="{5A4DBE89-2155-DA59-C8A0-2A85E86E5A9D}"/>
               </a:ext>
             </a:extLst>
           </p:cNvPr>
@@ -7846,8 +8395,8 @@
         </p:nvSpPr>
         <p:spPr>
           <a:xfrm>
-            <a:off x="10475976" y="1853184"/>
-            <a:ext cx="1280160" cy="676656"/>
+            <a:off x="5878122" y="1898035"/>
+            <a:ext cx="1473653" cy="676656"/>
           </a:xfrm>
           <a:prstGeom prst="ellipse">
             <a:avLst/>
@@ -7878,7 +8427,10 @@
               <a:rPr lang="en-US" dirty="0" err="1"/>
               <a:t>Obsese</a:t>
             </a:r>
-            <a:endParaRPr lang="en-US" dirty="0"/>
+            <a:r>
+              <a:rPr lang="en-US" dirty="0"/>
+              <a:t> ?</a:t>
+            </a:r>
           </a:p>
         </p:txBody>
       </p:sp>
@@ -7887,7 +8439,7 @@
           <p:cNvPr id="6" name="Oval 5">
             <a:extLst>
               <a:ext uri="{FF2B5EF4-FFF2-40B4-BE49-F238E27FC236}">
-                <a16:creationId xmlns:a16="http://schemas.microsoft.com/office/drawing/2014/main" id="{676B90C2-F1A7-0300-05F6-0511CA3FCBDC}"/>
+                <a16:creationId xmlns:a16="http://schemas.microsoft.com/office/drawing/2014/main" id="{427DAE89-1431-12A2-E4FD-40EEAC61CD08}"/>
               </a:ext>
             </a:extLst>
           </p:cNvPr>
@@ -7896,8 +8448,8 @@
         </p:nvSpPr>
         <p:spPr>
           <a:xfrm>
-            <a:off x="10124694" y="3319269"/>
-            <a:ext cx="847344" cy="859539"/>
+            <a:off x="2025030" y="2966854"/>
+            <a:ext cx="1696577" cy="859539"/>
           </a:xfrm>
           <a:prstGeom prst="ellipse">
             <a:avLst/>
@@ -7936,7 +8488,7 @@
           <p:cNvPr id="7" name="Oval 6">
             <a:extLst>
               <a:ext uri="{FF2B5EF4-FFF2-40B4-BE49-F238E27FC236}">
-                <a16:creationId xmlns:a16="http://schemas.microsoft.com/office/drawing/2014/main" id="{20A3945E-64B4-5A28-8B87-F7681BF810B5}"/>
+                <a16:creationId xmlns:a16="http://schemas.microsoft.com/office/drawing/2014/main" id="{6FDF07D9-CB50-72BB-C501-8A48B69E95EB}"/>
               </a:ext>
             </a:extLst>
           </p:cNvPr>
@@ -7945,7 +8497,7 @@
         </p:nvSpPr>
         <p:spPr>
           <a:xfrm>
-            <a:off x="8915400" y="3319270"/>
+            <a:off x="528839" y="3046863"/>
             <a:ext cx="1124712" cy="561083"/>
           </a:xfrm>
           <a:prstGeom prst="ellipse">
@@ -7985,7 +8537,7 @@
           <p:cNvPr id="8" name="Oval 7">
             <a:extLst>
               <a:ext uri="{FF2B5EF4-FFF2-40B4-BE49-F238E27FC236}">
-                <a16:creationId xmlns:a16="http://schemas.microsoft.com/office/drawing/2014/main" id="{828FB72F-EDDD-6AA9-70ED-51E29F91FEC5}"/>
+                <a16:creationId xmlns:a16="http://schemas.microsoft.com/office/drawing/2014/main" id="{929796E0-E522-78F2-70CB-BC54B1A3B8FE}"/>
               </a:ext>
             </a:extLst>
           </p:cNvPr>
@@ -7994,7 +8546,7 @@
         </p:nvSpPr>
         <p:spPr>
           <a:xfrm>
-            <a:off x="11055096" y="3319269"/>
+            <a:off x="4014596" y="3148458"/>
             <a:ext cx="1094232" cy="561083"/>
           </a:xfrm>
           <a:prstGeom prst="ellipse">
@@ -8029,175 +8581,1431 @@
           </a:p>
         </p:txBody>
       </p:sp>
-      <p:cxnSp>
-        <p:nvCxnSpPr>
-          <p:cNvPr id="12" name="Straight Arrow Connector 11">
+      <p:sp>
+        <p:nvSpPr>
+          <p:cNvPr id="14" name="Oval 13">
             <a:extLst>
               <a:ext uri="{FF2B5EF4-FFF2-40B4-BE49-F238E27FC236}">
-                <a16:creationId xmlns:a16="http://schemas.microsoft.com/office/drawing/2014/main" id="{811CFA32-0AF1-1F38-75A5-B022E70E42CF}"/>
+                <a16:creationId xmlns:a16="http://schemas.microsoft.com/office/drawing/2014/main" id="{13631470-3C50-1BD0-B524-4FAEF136499C}"/>
               </a:ext>
             </a:extLst>
           </p:cNvPr>
-          <p:cNvCxnSpPr>
-            <a:cxnSpLocks/>
-            <a:stCxn id="2" idx="3"/>
-          </p:cNvCxnSpPr>
+          <p:cNvSpPr/>
           <p:nvPr/>
-        </p:nvCxnSpPr>
+        </p:nvSpPr>
         <p:spPr>
-          <a:xfrm flipH="1">
-            <a:off x="9601200" y="1427954"/>
-            <a:ext cx="187475" cy="278926"/>
+          <a:xfrm>
+            <a:off x="4150735" y="4136668"/>
+            <a:ext cx="1373853" cy="595648"/>
           </a:xfrm>
-          <a:prstGeom prst="straightConnector1">
+          <a:prstGeom prst="ellipse">
             <a:avLst/>
           </a:prstGeom>
-          <a:ln>
-            <a:tailEnd type="triangle"/>
-          </a:ln>
+          <a:solidFill>
+            <a:srgbClr val="92D050"/>
+          </a:solidFill>
         </p:spPr>
         <p:style>
-          <a:lnRef idx="3">
-            <a:schemeClr val="accent2"/>
+          <a:lnRef idx="2">
+            <a:schemeClr val="accent1">
+              <a:shade val="15000"/>
+            </a:schemeClr>
           </a:lnRef>
-          <a:fillRef idx="0">
-            <a:schemeClr val="accent2"/>
+          <a:fillRef idx="1">
+            <a:schemeClr val="accent1"/>
           </a:fillRef>
-          <a:effectRef idx="2">
-            <a:schemeClr val="accent2"/>
+          <a:effectRef idx="0">
+            <a:schemeClr val="accent1"/>
           </a:effectRef>
           <a:fontRef idx="minor">
-            <a:schemeClr val="tx1"/>
+            <a:schemeClr val="lt1"/>
           </a:fontRef>
         </p:style>
-      </p:cxnSp>
-      <p:cxnSp>
-        <p:nvCxnSpPr>
-          <p:cNvPr id="15" name="Straight Arrow Connector 14">
+        <p:txBody>
+          <a:bodyPr rtlCol="0" anchor="ctr"/>
+          <a:lstStyle/>
+          <a:p>
+            <a:pPr algn="ctr"/>
+            <a:r>
+              <a:rPr lang="en-US" sz="1600" b="1" dirty="0"/>
+              <a:t>Healthy</a:t>
+            </a:r>
+          </a:p>
+        </p:txBody>
+      </p:sp>
+      <p:sp>
+        <p:nvSpPr>
+          <p:cNvPr id="18" name="Oval 17">
             <a:extLst>
               <a:ext uri="{FF2B5EF4-FFF2-40B4-BE49-F238E27FC236}">
-                <a16:creationId xmlns:a16="http://schemas.microsoft.com/office/drawing/2014/main" id="{701DB83A-76FE-5AD2-6DAD-02D35A57FA13}"/>
+                <a16:creationId xmlns:a16="http://schemas.microsoft.com/office/drawing/2014/main" id="{D2A226DA-F3F6-5F98-5AF5-4126750F9F1A}"/>
               </a:ext>
             </a:extLst>
           </p:cNvPr>
-          <p:cNvCxnSpPr>
-            <a:cxnSpLocks/>
-          </p:cNvCxnSpPr>
+          <p:cNvSpPr/>
           <p:nvPr/>
-        </p:nvCxnSpPr>
+        </p:nvSpPr>
         <p:spPr>
           <a:xfrm>
-            <a:off x="10867667" y="1477501"/>
-            <a:ext cx="187429" cy="229379"/>
+            <a:off x="2147774" y="4137718"/>
+            <a:ext cx="1621558" cy="595648"/>
           </a:xfrm>
-          <a:prstGeom prst="straightConnector1">
+          <a:prstGeom prst="ellipse">
             <a:avLst/>
           </a:prstGeom>
-          <a:ln>
-            <a:tailEnd type="triangle"/>
-          </a:ln>
+          <a:solidFill>
+            <a:srgbClr val="FF0000"/>
+          </a:solidFill>
         </p:spPr>
         <p:style>
-          <a:lnRef idx="3">
-            <a:schemeClr val="accent2"/>
+          <a:lnRef idx="2">
+            <a:schemeClr val="accent1">
+              <a:shade val="15000"/>
+            </a:schemeClr>
           </a:lnRef>
-          <a:fillRef idx="0">
-            <a:schemeClr val="accent2"/>
+          <a:fillRef idx="1">
+            <a:schemeClr val="accent1"/>
           </a:fillRef>
-          <a:effectRef idx="2">
-            <a:schemeClr val="accent2"/>
+          <a:effectRef idx="0">
+            <a:schemeClr val="accent1"/>
           </a:effectRef>
           <a:fontRef idx="minor">
-            <a:schemeClr val="tx1"/>
+            <a:schemeClr val="lt1"/>
           </a:fontRef>
         </p:style>
-      </p:cxnSp>
-      <p:cxnSp>
-        <p:nvCxnSpPr>
-          <p:cNvPr id="17" name="Straight Arrow Connector 16">
+        <p:txBody>
+          <a:bodyPr rtlCol="0" anchor="ctr"/>
+          <a:lstStyle/>
+          <a:p>
+            <a:pPr algn="ctr"/>
+            <a:r>
+              <a:rPr lang="en-US" sz="1600" b="1" dirty="0" err="1"/>
+              <a:t>UnHealthy</a:t>
+            </a:r>
+            <a:endParaRPr lang="en-US" sz="1600" b="1" dirty="0"/>
+          </a:p>
+        </p:txBody>
+      </p:sp>
+      <p:sp>
+        <p:nvSpPr>
+          <p:cNvPr id="20" name="Oval 19">
             <a:extLst>
               <a:ext uri="{FF2B5EF4-FFF2-40B4-BE49-F238E27FC236}">
-                <a16:creationId xmlns:a16="http://schemas.microsoft.com/office/drawing/2014/main" id="{B3D33047-94CF-08C3-CA8C-099A6C38023C}"/>
+                <a16:creationId xmlns:a16="http://schemas.microsoft.com/office/drawing/2014/main" id="{BD374144-CFE5-2353-5E6D-4FC70B711ADE}"/>
               </a:ext>
             </a:extLst>
           </p:cNvPr>
-          <p:cNvCxnSpPr>
-            <a:cxnSpLocks/>
-          </p:cNvCxnSpPr>
+          <p:cNvSpPr/>
           <p:nvPr/>
-        </p:nvCxnSpPr>
+        </p:nvSpPr>
         <p:spPr>
-          <a:xfrm flipH="1">
-            <a:off x="9226296" y="2529840"/>
-            <a:ext cx="201168" cy="670560"/>
+          <a:xfrm>
+            <a:off x="280416" y="4136668"/>
+            <a:ext cx="1621558" cy="595648"/>
           </a:xfrm>
-          <a:prstGeom prst="straightConnector1">
+          <a:prstGeom prst="ellipse">
             <a:avLst/>
           </a:prstGeom>
-          <a:ln>
-            <a:tailEnd type="triangle"/>
-          </a:ln>
+          <a:solidFill>
+            <a:srgbClr val="FF0000"/>
+          </a:solidFill>
         </p:spPr>
         <p:style>
-          <a:lnRef idx="3">
-            <a:schemeClr val="accent2"/>
+          <a:lnRef idx="2">
+            <a:schemeClr val="accent1">
+              <a:shade val="15000"/>
+            </a:schemeClr>
           </a:lnRef>
-          <a:fillRef idx="0">
-            <a:schemeClr val="accent2"/>
+          <a:fillRef idx="1">
+            <a:schemeClr val="accent1"/>
           </a:fillRef>
-          <a:effectRef idx="2">
-            <a:schemeClr val="accent2"/>
+          <a:effectRef idx="0">
+            <a:schemeClr val="accent1"/>
           </a:effectRef>
           <a:fontRef idx="minor">
-            <a:schemeClr val="tx1"/>
+            <a:schemeClr val="lt1"/>
           </a:fontRef>
         </p:style>
-      </p:cxnSp>
-      <p:cxnSp>
-        <p:nvCxnSpPr>
-          <p:cNvPr id="19" name="Straight Arrow Connector 18">
+        <p:txBody>
+          <a:bodyPr rtlCol="0" anchor="ctr"/>
+          <a:lstStyle/>
+          <a:p>
+            <a:pPr algn="ctr"/>
+            <a:r>
+              <a:rPr lang="en-US" sz="1600" b="1" dirty="0" err="1"/>
+              <a:t>UnHealthy</a:t>
+            </a:r>
+            <a:endParaRPr lang="en-US" sz="1600" b="1" dirty="0"/>
+          </a:p>
+        </p:txBody>
+      </p:sp>
+      <p:sp>
+        <p:nvSpPr>
+          <p:cNvPr id="24" name="TextBox 23">
             <a:extLst>
               <a:ext uri="{FF2B5EF4-FFF2-40B4-BE49-F238E27FC236}">
-                <a16:creationId xmlns:a16="http://schemas.microsoft.com/office/drawing/2014/main" id="{A8BB8244-94BF-435F-F6AC-22E6DCA09FD4}"/>
+                <a16:creationId xmlns:a16="http://schemas.microsoft.com/office/drawing/2014/main" id="{FECB020F-2924-5490-F190-ED091341ED0D}"/>
               </a:ext>
             </a:extLst>
           </p:cNvPr>
-          <p:cNvCxnSpPr>
-            <a:cxnSpLocks/>
-          </p:cNvCxnSpPr>
+          <p:cNvSpPr txBox="1"/>
           <p:nvPr/>
-        </p:nvCxnSpPr>
+        </p:nvSpPr>
         <p:spPr>
           <a:xfrm>
-            <a:off x="9967722" y="2429253"/>
-            <a:ext cx="508254" cy="780288"/>
+            <a:off x="2371257" y="884650"/>
+            <a:ext cx="502061" cy="369332"/>
           </a:xfrm>
-          <a:prstGeom prst="straightConnector1">
+          <a:prstGeom prst="rect">
             <a:avLst/>
           </a:prstGeom>
-          <a:ln>
-            <a:tailEnd type="triangle"/>
-          </a:ln>
+          <a:noFill/>
+        </p:spPr>
+        <p:txBody>
+          <a:bodyPr wrap="none" rtlCol="0">
+            <a:spAutoFit/>
+          </a:bodyPr>
+          <a:lstStyle/>
+          <a:p>
+            <a:r>
+              <a:rPr lang="en-US" dirty="0">
+                <a:solidFill>
+                  <a:schemeClr val="accent6">
+                    <a:lumMod val="60000"/>
+                    <a:lumOff val="40000"/>
+                  </a:schemeClr>
+                </a:solidFill>
+              </a:rPr>
+              <a:t>Yes</a:t>
+            </a:r>
+          </a:p>
+        </p:txBody>
+      </p:sp>
+      <p:sp>
+        <p:nvSpPr>
+          <p:cNvPr id="25" name="TextBox 24">
+            <a:extLst>
+              <a:ext uri="{FF2B5EF4-FFF2-40B4-BE49-F238E27FC236}">
+                <a16:creationId xmlns:a16="http://schemas.microsoft.com/office/drawing/2014/main" id="{DD76F739-93CD-F4CC-AD59-CA8DF940CC8D}"/>
+              </a:ext>
+            </a:extLst>
+          </p:cNvPr>
+          <p:cNvSpPr txBox="1"/>
+          <p:nvPr/>
+        </p:nvSpPr>
+        <p:spPr>
+          <a:xfrm>
+            <a:off x="5979865" y="1104028"/>
+            <a:ext cx="455574" cy="369332"/>
+          </a:xfrm>
+          <a:prstGeom prst="rect">
+            <a:avLst/>
+          </a:prstGeom>
+          <a:noFill/>
+        </p:spPr>
+        <p:txBody>
+          <a:bodyPr wrap="none" rtlCol="0">
+            <a:spAutoFit/>
+          </a:bodyPr>
+          <a:lstStyle/>
+          <a:p>
+            <a:r>
+              <a:rPr lang="en-US" dirty="0">
+                <a:solidFill>
+                  <a:schemeClr val="accent6">
+                    <a:lumMod val="60000"/>
+                    <a:lumOff val="40000"/>
+                  </a:schemeClr>
+                </a:solidFill>
+              </a:rPr>
+              <a:t>No</a:t>
+            </a:r>
+          </a:p>
+        </p:txBody>
+      </p:sp>
+      <p:sp>
+        <p:nvSpPr>
+          <p:cNvPr id="10" name="Oval 9">
+            <a:extLst>
+              <a:ext uri="{FF2B5EF4-FFF2-40B4-BE49-F238E27FC236}">
+                <a16:creationId xmlns:a16="http://schemas.microsoft.com/office/drawing/2014/main" id="{41328B10-4474-6120-825D-2D2690539D9D}"/>
+              </a:ext>
+            </a:extLst>
+          </p:cNvPr>
+          <p:cNvSpPr/>
+          <p:nvPr/>
+        </p:nvSpPr>
+        <p:spPr>
+          <a:xfrm>
+            <a:off x="5932632" y="3310122"/>
+            <a:ext cx="1621558" cy="595648"/>
+          </a:xfrm>
+          <a:prstGeom prst="ellipse">
+            <a:avLst/>
+          </a:prstGeom>
+          <a:solidFill>
+            <a:srgbClr val="FF0000"/>
+          </a:solidFill>
         </p:spPr>
         <p:style>
-          <a:lnRef idx="3">
-            <a:schemeClr val="accent2"/>
+          <a:lnRef idx="2">
+            <a:schemeClr val="accent1">
+              <a:shade val="15000"/>
+            </a:schemeClr>
           </a:lnRef>
-          <a:fillRef idx="0">
-            <a:schemeClr val="accent2"/>
+          <a:fillRef idx="1">
+            <a:schemeClr val="accent1"/>
           </a:fillRef>
-          <a:effectRef idx="2">
-            <a:schemeClr val="accent2"/>
+          <a:effectRef idx="0">
+            <a:schemeClr val="accent1"/>
           </a:effectRef>
           <a:fontRef idx="minor">
-            <a:schemeClr val="tx1"/>
+            <a:schemeClr val="lt1"/>
           </a:fontRef>
         </p:style>
-      </p:cxnSp>
+        <p:txBody>
+          <a:bodyPr rtlCol="0" anchor="ctr"/>
+          <a:lstStyle/>
+          <a:p>
+            <a:pPr algn="ctr"/>
+            <a:r>
+              <a:rPr lang="en-US" sz="1600" b="1" dirty="0" err="1"/>
+              <a:t>UnHealthy</a:t>
+            </a:r>
+            <a:endParaRPr lang="en-US" sz="1600" b="1" dirty="0"/>
+          </a:p>
+        </p:txBody>
+      </p:sp>
+      <p:sp>
+        <p:nvSpPr>
+          <p:cNvPr id="11" name="Oval 10">
+            <a:extLst>
+              <a:ext uri="{FF2B5EF4-FFF2-40B4-BE49-F238E27FC236}">
+                <a16:creationId xmlns:a16="http://schemas.microsoft.com/office/drawing/2014/main" id="{74324C6C-F879-FAD7-CF84-FCFB765F0DF1}"/>
+              </a:ext>
+            </a:extLst>
+          </p:cNvPr>
+          <p:cNvSpPr/>
+          <p:nvPr/>
+        </p:nvSpPr>
+        <p:spPr>
+          <a:xfrm>
+            <a:off x="8143615" y="3310122"/>
+            <a:ext cx="1373853" cy="595648"/>
+          </a:xfrm>
+          <a:prstGeom prst="ellipse">
+            <a:avLst/>
+          </a:prstGeom>
+          <a:solidFill>
+            <a:srgbClr val="92D050"/>
+          </a:solidFill>
+        </p:spPr>
+        <p:style>
+          <a:lnRef idx="2">
+            <a:schemeClr val="accent1">
+              <a:shade val="15000"/>
+            </a:schemeClr>
+          </a:lnRef>
+          <a:fillRef idx="1">
+            <a:schemeClr val="accent1"/>
+          </a:fillRef>
+          <a:effectRef idx="0">
+            <a:schemeClr val="accent1"/>
+          </a:effectRef>
+          <a:fontRef idx="minor">
+            <a:schemeClr val="lt1"/>
+          </a:fontRef>
+        </p:style>
+        <p:txBody>
+          <a:bodyPr rtlCol="0" anchor="ctr"/>
+          <a:lstStyle/>
+          <a:p>
+            <a:pPr algn="ctr"/>
+            <a:r>
+              <a:rPr lang="en-US" sz="1600" b="1" dirty="0"/>
+              <a:t>Healthy</a:t>
+            </a:r>
+          </a:p>
+        </p:txBody>
+      </p:sp>
+      <mc:AlternateContent xmlns:mc="http://schemas.openxmlformats.org/markup-compatibility/2006" xmlns:p14="http://schemas.microsoft.com/office/powerpoint/2010/main">
+        <mc:Choice Requires="p14">
+          <p:contentPart p14:bwMode="auto" r:id="rId2">
+            <p14:nvContentPartPr>
+              <p14:cNvPr id="16" name="Ink 15">
+                <a:extLst>
+                  <a:ext uri="{FF2B5EF4-FFF2-40B4-BE49-F238E27FC236}">
+                    <a16:creationId xmlns:a16="http://schemas.microsoft.com/office/drawing/2014/main" id="{1B7B0845-75C2-3493-944D-49EBD0849295}"/>
+                  </a:ext>
+                </a:extLst>
+              </p14:cNvPr>
+              <p14:cNvContentPartPr/>
+              <p14:nvPr/>
+            </p14:nvContentPartPr>
+            <p14:xfrm>
+              <a:off x="2802384" y="974736"/>
+              <a:ext cx="970920" cy="755640"/>
+            </p14:xfrm>
+          </p:contentPart>
+        </mc:Choice>
+        <mc:Fallback xmlns="">
+          <p:pic>
+            <p:nvPicPr>
+              <p:cNvPr id="16" name="Ink 15">
+                <a:extLst>
+                  <a:ext uri="{FF2B5EF4-FFF2-40B4-BE49-F238E27FC236}">
+                    <a16:creationId xmlns:a16="http://schemas.microsoft.com/office/drawing/2014/main" id="{1B7B0845-75C2-3493-944D-49EBD0849295}"/>
+                  </a:ext>
+                </a:extLst>
+              </p:cNvPr>
+              <p:cNvPicPr/>
+              <p:nvPr/>
+            </p:nvPicPr>
+            <p:blipFill>
+              <a:blip r:embed="rId3"/>
+              <a:stretch>
+                <a:fillRect/>
+              </a:stretch>
+            </p:blipFill>
+            <p:spPr>
+              <a:xfrm>
+                <a:off x="2784384" y="956736"/>
+                <a:ext cx="1006560" cy="791280"/>
+              </a:xfrm>
+              <a:prstGeom prst="rect">
+                <a:avLst/>
+              </a:prstGeom>
+            </p:spPr>
+          </p:pic>
+        </mc:Fallback>
+      </mc:AlternateContent>
+      <mc:AlternateContent xmlns:mc="http://schemas.openxmlformats.org/markup-compatibility/2006" xmlns:p14="http://schemas.microsoft.com/office/powerpoint/2010/main">
+        <mc:Choice Requires="p14">
+          <p:contentPart p14:bwMode="auto" r:id="rId4">
+            <p14:nvContentPartPr>
+              <p14:cNvPr id="21" name="Ink 20">
+                <a:extLst>
+                  <a:ext uri="{FF2B5EF4-FFF2-40B4-BE49-F238E27FC236}">
+                    <a16:creationId xmlns:a16="http://schemas.microsoft.com/office/drawing/2014/main" id="{EA09C378-D498-E15E-65D0-89BE99A5FC13}"/>
+                  </a:ext>
+                </a:extLst>
+              </p14:cNvPr>
+              <p14:cNvContentPartPr/>
+              <p14:nvPr/>
+            </p14:nvContentPartPr>
+            <p14:xfrm>
+              <a:off x="5137344" y="1054296"/>
+              <a:ext cx="832320" cy="803880"/>
+            </p14:xfrm>
+          </p:contentPart>
+        </mc:Choice>
+        <mc:Fallback xmlns="">
+          <p:pic>
+            <p:nvPicPr>
+              <p:cNvPr id="21" name="Ink 20">
+                <a:extLst>
+                  <a:ext uri="{FF2B5EF4-FFF2-40B4-BE49-F238E27FC236}">
+                    <a16:creationId xmlns:a16="http://schemas.microsoft.com/office/drawing/2014/main" id="{EA09C378-D498-E15E-65D0-89BE99A5FC13}"/>
+                  </a:ext>
+                </a:extLst>
+              </p:cNvPr>
+              <p:cNvPicPr/>
+              <p:nvPr/>
+            </p:nvPicPr>
+            <p:blipFill>
+              <a:blip r:embed="rId5"/>
+              <a:stretch>
+                <a:fillRect/>
+              </a:stretch>
+            </p:blipFill>
+            <p:spPr>
+              <a:xfrm>
+                <a:off x="5119704" y="1036296"/>
+                <a:ext cx="867960" cy="839520"/>
+              </a:xfrm>
+              <a:prstGeom prst="rect">
+                <a:avLst/>
+              </a:prstGeom>
+            </p:spPr>
+          </p:pic>
+        </mc:Fallback>
+      </mc:AlternateContent>
+      <mc:AlternateContent xmlns:mc="http://schemas.openxmlformats.org/markup-compatibility/2006" xmlns:p14="http://schemas.microsoft.com/office/powerpoint/2010/main">
+        <mc:Choice Requires="p14">
+          <p:contentPart p14:bwMode="auto" r:id="rId6">
+            <p14:nvContentPartPr>
+              <p14:cNvPr id="22" name="Ink 21">
+                <a:extLst>
+                  <a:ext uri="{FF2B5EF4-FFF2-40B4-BE49-F238E27FC236}">
+                    <a16:creationId xmlns:a16="http://schemas.microsoft.com/office/drawing/2014/main" id="{CC556735-2186-305E-13D6-0D7AC94B340E}"/>
+                  </a:ext>
+                </a:extLst>
+              </p14:cNvPr>
+              <p14:cNvContentPartPr/>
+              <p14:nvPr/>
+            </p14:nvContentPartPr>
+            <p14:xfrm>
+              <a:off x="1236744" y="2528496"/>
+              <a:ext cx="395640" cy="413640"/>
+            </p14:xfrm>
+          </p:contentPart>
+        </mc:Choice>
+        <mc:Fallback xmlns="">
+          <p:pic>
+            <p:nvPicPr>
+              <p:cNvPr id="22" name="Ink 21">
+                <a:extLst>
+                  <a:ext uri="{FF2B5EF4-FFF2-40B4-BE49-F238E27FC236}">
+                    <a16:creationId xmlns:a16="http://schemas.microsoft.com/office/drawing/2014/main" id="{CC556735-2186-305E-13D6-0D7AC94B340E}"/>
+                  </a:ext>
+                </a:extLst>
+              </p:cNvPr>
+              <p:cNvPicPr/>
+              <p:nvPr/>
+            </p:nvPicPr>
+            <p:blipFill>
+              <a:blip r:embed="rId7"/>
+              <a:stretch>
+                <a:fillRect/>
+              </a:stretch>
+            </p:blipFill>
+            <p:spPr>
+              <a:xfrm>
+                <a:off x="1219104" y="2510856"/>
+                <a:ext cx="431280" cy="449280"/>
+              </a:xfrm>
+              <a:prstGeom prst="rect">
+                <a:avLst/>
+              </a:prstGeom>
+            </p:spPr>
+          </p:pic>
+        </mc:Fallback>
+      </mc:AlternateContent>
+      <p:grpSp>
+        <p:nvGrpSpPr>
+          <p:cNvPr id="29" name="Group 28">
+            <a:extLst>
+              <a:ext uri="{FF2B5EF4-FFF2-40B4-BE49-F238E27FC236}">
+                <a16:creationId xmlns:a16="http://schemas.microsoft.com/office/drawing/2014/main" id="{1FA9B7AB-F2BB-5F78-C078-1E3BB4B8F39A}"/>
+              </a:ext>
+            </a:extLst>
+          </p:cNvPr>
+          <p:cNvGrpSpPr/>
+          <p:nvPr/>
+        </p:nvGrpSpPr>
+        <p:grpSpPr>
+          <a:xfrm>
+            <a:off x="2482344" y="2426616"/>
+            <a:ext cx="1718280" cy="675000"/>
+            <a:chOff x="2482344" y="2426616"/>
+            <a:chExt cx="1718280" cy="675000"/>
+          </a:xfrm>
+        </p:grpSpPr>
+        <mc:AlternateContent xmlns:mc="http://schemas.openxmlformats.org/markup-compatibility/2006" xmlns:p14="http://schemas.microsoft.com/office/powerpoint/2010/main">
+          <mc:Choice Requires="p14">
+            <p:contentPart p14:bwMode="auto" r:id="rId8">
+              <p14:nvContentPartPr>
+                <p14:cNvPr id="23" name="Ink 22">
+                  <a:extLst>
+                    <a:ext uri="{FF2B5EF4-FFF2-40B4-BE49-F238E27FC236}">
+                      <a16:creationId xmlns:a16="http://schemas.microsoft.com/office/drawing/2014/main" id="{AEAB1C5F-1D24-FA59-1544-36E49C8E0C6B}"/>
+                    </a:ext>
+                  </a:extLst>
+                </p14:cNvPr>
+                <p14:cNvContentPartPr/>
+                <p14:nvPr/>
+              </p14:nvContentPartPr>
+              <p14:xfrm>
+                <a:off x="2602944" y="2568096"/>
+                <a:ext cx="11160" cy="301320"/>
+              </p14:xfrm>
+            </p:contentPart>
+          </mc:Choice>
+          <mc:Fallback xmlns="">
+            <p:pic>
+              <p:nvPicPr>
+                <p:cNvPr id="23" name="Ink 22">
+                  <a:extLst>
+                    <a:ext uri="{FF2B5EF4-FFF2-40B4-BE49-F238E27FC236}">
+                      <a16:creationId xmlns:a16="http://schemas.microsoft.com/office/drawing/2014/main" id="{AEAB1C5F-1D24-FA59-1544-36E49C8E0C6B}"/>
+                    </a:ext>
+                  </a:extLst>
+                </p:cNvPr>
+                <p:cNvPicPr/>
+                <p:nvPr/>
+              </p:nvPicPr>
+              <p:blipFill>
+                <a:blip r:embed="rId9"/>
+                <a:stretch>
+                  <a:fillRect/>
+                </a:stretch>
+              </p:blipFill>
+              <p:spPr>
+                <a:xfrm>
+                  <a:off x="2584944" y="2550096"/>
+                  <a:ext cx="46800" cy="336960"/>
+                </a:xfrm>
+                <a:prstGeom prst="rect">
+                  <a:avLst/>
+                </a:prstGeom>
+              </p:spPr>
+            </p:pic>
+          </mc:Fallback>
+        </mc:AlternateContent>
+        <mc:AlternateContent xmlns:mc="http://schemas.openxmlformats.org/markup-compatibility/2006" xmlns:p14="http://schemas.microsoft.com/office/powerpoint/2010/main">
+          <mc:Choice Requires="p14">
+            <p:contentPart p14:bwMode="auto" r:id="rId10">
+              <p14:nvContentPartPr>
+                <p14:cNvPr id="26" name="Ink 25">
+                  <a:extLst>
+                    <a:ext uri="{FF2B5EF4-FFF2-40B4-BE49-F238E27FC236}">
+                      <a16:creationId xmlns:a16="http://schemas.microsoft.com/office/drawing/2014/main" id="{E945C77B-C072-2704-F0F3-BDD56585ED3C}"/>
+                    </a:ext>
+                  </a:extLst>
+                </p14:cNvPr>
+                <p14:cNvContentPartPr/>
+                <p14:nvPr/>
+              </p14:nvContentPartPr>
+              <p14:xfrm>
+                <a:off x="2482344" y="2768616"/>
+                <a:ext cx="243360" cy="146520"/>
+              </p14:xfrm>
+            </p:contentPart>
+          </mc:Choice>
+          <mc:Fallback xmlns="">
+            <p:pic>
+              <p:nvPicPr>
+                <p:cNvPr id="26" name="Ink 25">
+                  <a:extLst>
+                    <a:ext uri="{FF2B5EF4-FFF2-40B4-BE49-F238E27FC236}">
+                      <a16:creationId xmlns:a16="http://schemas.microsoft.com/office/drawing/2014/main" id="{E945C77B-C072-2704-F0F3-BDD56585ED3C}"/>
+                    </a:ext>
+                  </a:extLst>
+                </p:cNvPr>
+                <p:cNvPicPr/>
+                <p:nvPr/>
+              </p:nvPicPr>
+              <p:blipFill>
+                <a:blip r:embed="rId11"/>
+                <a:stretch>
+                  <a:fillRect/>
+                </a:stretch>
+              </p:blipFill>
+              <p:spPr>
+                <a:xfrm>
+                  <a:off x="2464704" y="2750616"/>
+                  <a:ext cx="279000" cy="182160"/>
+                </a:xfrm>
+                <a:prstGeom prst="rect">
+                  <a:avLst/>
+                </a:prstGeom>
+              </p:spPr>
+            </p:pic>
+          </mc:Fallback>
+        </mc:AlternateContent>
+        <mc:AlternateContent xmlns:mc="http://schemas.openxmlformats.org/markup-compatibility/2006" xmlns:p14="http://schemas.microsoft.com/office/powerpoint/2010/main">
+          <mc:Choice Requires="p14">
+            <p:contentPart p14:bwMode="auto" r:id="rId12">
+              <p14:nvContentPartPr>
+                <p14:cNvPr id="27" name="Ink 26">
+                  <a:extLst>
+                    <a:ext uri="{FF2B5EF4-FFF2-40B4-BE49-F238E27FC236}">
+                      <a16:creationId xmlns:a16="http://schemas.microsoft.com/office/drawing/2014/main" id="{052082F7-04FF-B596-1E60-553B74D89D17}"/>
+                    </a:ext>
+                  </a:extLst>
+                </p14:cNvPr>
+                <p14:cNvContentPartPr/>
+                <p14:nvPr/>
+              </p14:nvContentPartPr>
+              <p14:xfrm>
+                <a:off x="3115224" y="2426616"/>
+                <a:ext cx="1085400" cy="593280"/>
+              </p14:xfrm>
+            </p:contentPart>
+          </mc:Choice>
+          <mc:Fallback xmlns="">
+            <p:pic>
+              <p:nvPicPr>
+                <p:cNvPr id="27" name="Ink 26">
+                  <a:extLst>
+                    <a:ext uri="{FF2B5EF4-FFF2-40B4-BE49-F238E27FC236}">
+                      <a16:creationId xmlns:a16="http://schemas.microsoft.com/office/drawing/2014/main" id="{052082F7-04FF-B596-1E60-553B74D89D17}"/>
+                    </a:ext>
+                  </a:extLst>
+                </p:cNvPr>
+                <p:cNvPicPr/>
+                <p:nvPr/>
+              </p:nvPicPr>
+              <p:blipFill>
+                <a:blip r:embed="rId13"/>
+                <a:stretch>
+                  <a:fillRect/>
+                </a:stretch>
+              </p:blipFill>
+              <p:spPr>
+                <a:xfrm>
+                  <a:off x="3097584" y="2408976"/>
+                  <a:ext cx="1121040" cy="628920"/>
+                </a:xfrm>
+                <a:prstGeom prst="rect">
+                  <a:avLst/>
+                </a:prstGeom>
+              </p:spPr>
+            </p:pic>
+          </mc:Fallback>
+        </mc:AlternateContent>
+        <mc:AlternateContent xmlns:mc="http://schemas.openxmlformats.org/markup-compatibility/2006" xmlns:p14="http://schemas.microsoft.com/office/powerpoint/2010/main">
+          <mc:Choice Requires="p14">
+            <p:contentPart p14:bwMode="auto" r:id="rId14">
+              <p14:nvContentPartPr>
+                <p14:cNvPr id="28" name="Ink 27">
+                  <a:extLst>
+                    <a:ext uri="{FF2B5EF4-FFF2-40B4-BE49-F238E27FC236}">
+                      <a16:creationId xmlns:a16="http://schemas.microsoft.com/office/drawing/2014/main" id="{5A490B82-E15C-1AB7-BB98-4A5685D6E9E0}"/>
+                    </a:ext>
+                  </a:extLst>
+                </p14:cNvPr>
+                <p14:cNvContentPartPr/>
+                <p14:nvPr/>
+              </p14:nvContentPartPr>
+              <p14:xfrm>
+                <a:off x="3950064" y="2840616"/>
+                <a:ext cx="220680" cy="261000"/>
+              </p14:xfrm>
+            </p:contentPart>
+          </mc:Choice>
+          <mc:Fallback xmlns="">
+            <p:pic>
+              <p:nvPicPr>
+                <p:cNvPr id="28" name="Ink 27">
+                  <a:extLst>
+                    <a:ext uri="{FF2B5EF4-FFF2-40B4-BE49-F238E27FC236}">
+                      <a16:creationId xmlns:a16="http://schemas.microsoft.com/office/drawing/2014/main" id="{5A490B82-E15C-1AB7-BB98-4A5685D6E9E0}"/>
+                    </a:ext>
+                  </a:extLst>
+                </p:cNvPr>
+                <p:cNvPicPr/>
+                <p:nvPr/>
+              </p:nvPicPr>
+              <p:blipFill>
+                <a:blip r:embed="rId15"/>
+                <a:stretch>
+                  <a:fillRect/>
+                </a:stretch>
+              </p:blipFill>
+              <p:spPr>
+                <a:xfrm>
+                  <a:off x="3932424" y="2822616"/>
+                  <a:ext cx="256320" cy="296640"/>
+                </a:xfrm>
+                <a:prstGeom prst="rect">
+                  <a:avLst/>
+                </a:prstGeom>
+              </p:spPr>
+            </p:pic>
+          </mc:Fallback>
+        </mc:AlternateContent>
+      </p:grpSp>
+      <mc:AlternateContent xmlns:mc="http://schemas.openxmlformats.org/markup-compatibility/2006" xmlns:p14="http://schemas.microsoft.com/office/powerpoint/2010/main">
+        <mc:Choice Requires="p14">
+          <p:contentPart p14:bwMode="auto" r:id="rId16">
+            <p14:nvContentPartPr>
+              <p14:cNvPr id="30" name="Ink 29">
+                <a:extLst>
+                  <a:ext uri="{FF2B5EF4-FFF2-40B4-BE49-F238E27FC236}">
+                    <a16:creationId xmlns:a16="http://schemas.microsoft.com/office/drawing/2014/main" id="{2004DEC2-8037-B9B1-BAD9-18781D58D7A6}"/>
+                  </a:ext>
+                </a:extLst>
+              </p14:cNvPr>
+              <p14:cNvContentPartPr/>
+              <p14:nvPr/>
+            </p14:nvContentPartPr>
+            <p14:xfrm>
+              <a:off x="973224" y="3652056"/>
+              <a:ext cx="182160" cy="301320"/>
+            </p14:xfrm>
+          </p:contentPart>
+        </mc:Choice>
+        <mc:Fallback xmlns="">
+          <p:pic>
+            <p:nvPicPr>
+              <p:cNvPr id="30" name="Ink 29">
+                <a:extLst>
+                  <a:ext uri="{FF2B5EF4-FFF2-40B4-BE49-F238E27FC236}">
+                    <a16:creationId xmlns:a16="http://schemas.microsoft.com/office/drawing/2014/main" id="{2004DEC2-8037-B9B1-BAD9-18781D58D7A6}"/>
+                  </a:ext>
+                </a:extLst>
+              </p:cNvPr>
+              <p:cNvPicPr/>
+              <p:nvPr/>
+            </p:nvPicPr>
+            <p:blipFill>
+              <a:blip r:embed="rId17"/>
+              <a:stretch>
+                <a:fillRect/>
+              </a:stretch>
+            </p:blipFill>
+            <p:spPr>
+              <a:xfrm>
+                <a:off x="955224" y="3634416"/>
+                <a:ext cx="217800" cy="336960"/>
+              </a:xfrm>
+              <a:prstGeom prst="rect">
+                <a:avLst/>
+              </a:prstGeom>
+            </p:spPr>
+          </p:pic>
+        </mc:Fallback>
+      </mc:AlternateContent>
+      <mc:AlternateContent xmlns:mc="http://schemas.openxmlformats.org/markup-compatibility/2006" xmlns:p14="http://schemas.microsoft.com/office/powerpoint/2010/main">
+        <mc:Choice Requires="p14">
+          <p:contentPart p14:bwMode="auto" r:id="rId18">
+            <p14:nvContentPartPr>
+              <p14:cNvPr id="31" name="Ink 30">
+                <a:extLst>
+                  <a:ext uri="{FF2B5EF4-FFF2-40B4-BE49-F238E27FC236}">
+                    <a16:creationId xmlns:a16="http://schemas.microsoft.com/office/drawing/2014/main" id="{A41CA29B-FDEE-B401-776B-CDC48DE949D2}"/>
+                  </a:ext>
+                </a:extLst>
+              </p14:cNvPr>
+              <p14:cNvContentPartPr/>
+              <p14:nvPr/>
+            </p14:nvContentPartPr>
+            <p14:xfrm>
+              <a:off x="2830104" y="3856896"/>
+              <a:ext cx="220320" cy="250920"/>
+            </p14:xfrm>
+          </p:contentPart>
+        </mc:Choice>
+        <mc:Fallback xmlns="">
+          <p:pic>
+            <p:nvPicPr>
+              <p:cNvPr id="31" name="Ink 30">
+                <a:extLst>
+                  <a:ext uri="{FF2B5EF4-FFF2-40B4-BE49-F238E27FC236}">
+                    <a16:creationId xmlns:a16="http://schemas.microsoft.com/office/drawing/2014/main" id="{A41CA29B-FDEE-B401-776B-CDC48DE949D2}"/>
+                  </a:ext>
+                </a:extLst>
+              </p:cNvPr>
+              <p:cNvPicPr/>
+              <p:nvPr/>
+            </p:nvPicPr>
+            <p:blipFill>
+              <a:blip r:embed="rId19"/>
+              <a:stretch>
+                <a:fillRect/>
+              </a:stretch>
+            </p:blipFill>
+            <p:spPr>
+              <a:xfrm>
+                <a:off x="2812104" y="3839256"/>
+                <a:ext cx="255960" cy="286560"/>
+              </a:xfrm>
+              <a:prstGeom prst="rect">
+                <a:avLst/>
+              </a:prstGeom>
+            </p:spPr>
+          </p:pic>
+        </mc:Fallback>
+      </mc:AlternateContent>
+      <mc:AlternateContent xmlns:mc="http://schemas.openxmlformats.org/markup-compatibility/2006" xmlns:p14="http://schemas.microsoft.com/office/powerpoint/2010/main">
+        <mc:Choice Requires="p14">
+          <p:contentPart p14:bwMode="auto" r:id="rId20">
+            <p14:nvContentPartPr>
+              <p14:cNvPr id="32" name="Ink 31">
+                <a:extLst>
+                  <a:ext uri="{FF2B5EF4-FFF2-40B4-BE49-F238E27FC236}">
+                    <a16:creationId xmlns:a16="http://schemas.microsoft.com/office/drawing/2014/main" id="{A95BAF4D-A762-15BE-6903-CAACFDCF12D0}"/>
+                  </a:ext>
+                </a:extLst>
+              </p14:cNvPr>
+              <p14:cNvContentPartPr/>
+              <p14:nvPr/>
+            </p14:nvContentPartPr>
+            <p14:xfrm>
+              <a:off x="4613184" y="3734136"/>
+              <a:ext cx="235440" cy="337320"/>
+            </p14:xfrm>
+          </p:contentPart>
+        </mc:Choice>
+        <mc:Fallback xmlns="">
+          <p:pic>
+            <p:nvPicPr>
+              <p:cNvPr id="32" name="Ink 31">
+                <a:extLst>
+                  <a:ext uri="{FF2B5EF4-FFF2-40B4-BE49-F238E27FC236}">
+                    <a16:creationId xmlns:a16="http://schemas.microsoft.com/office/drawing/2014/main" id="{A95BAF4D-A762-15BE-6903-CAACFDCF12D0}"/>
+                  </a:ext>
+                </a:extLst>
+              </p:cNvPr>
+              <p:cNvPicPr/>
+              <p:nvPr/>
+            </p:nvPicPr>
+            <p:blipFill>
+              <a:blip r:embed="rId21"/>
+              <a:stretch>
+                <a:fillRect/>
+              </a:stretch>
+            </p:blipFill>
+            <p:spPr>
+              <a:xfrm>
+                <a:off x="4595184" y="3716496"/>
+                <a:ext cx="271080" cy="372960"/>
+              </a:xfrm>
+              <a:prstGeom prst="rect">
+                <a:avLst/>
+              </a:prstGeom>
+            </p:spPr>
+          </p:pic>
+        </mc:Fallback>
+      </mc:AlternateContent>
+      <p:grpSp>
+        <p:nvGrpSpPr>
+          <p:cNvPr id="42" name="Group 41">
+            <a:extLst>
+              <a:ext uri="{FF2B5EF4-FFF2-40B4-BE49-F238E27FC236}">
+                <a16:creationId xmlns:a16="http://schemas.microsoft.com/office/drawing/2014/main" id="{555D4BA8-4401-B937-6F3F-DD181337AF11}"/>
+              </a:ext>
+            </a:extLst>
+          </p:cNvPr>
+          <p:cNvGrpSpPr/>
+          <p:nvPr/>
+        </p:nvGrpSpPr>
+        <p:grpSpPr>
+          <a:xfrm>
+            <a:off x="5813784" y="2652696"/>
+            <a:ext cx="869760" cy="541440"/>
+            <a:chOff x="5813784" y="2652696"/>
+            <a:chExt cx="869760" cy="541440"/>
+          </a:xfrm>
+        </p:grpSpPr>
+        <mc:AlternateContent xmlns:mc="http://schemas.openxmlformats.org/markup-compatibility/2006" xmlns:p14="http://schemas.microsoft.com/office/powerpoint/2010/main">
+          <mc:Choice Requires="p14">
+            <p:contentPart p14:bwMode="auto" r:id="rId22">
+              <p14:nvContentPartPr>
+                <p14:cNvPr id="33" name="Ink 32">
+                  <a:extLst>
+                    <a:ext uri="{FF2B5EF4-FFF2-40B4-BE49-F238E27FC236}">
+                      <a16:creationId xmlns:a16="http://schemas.microsoft.com/office/drawing/2014/main" id="{F70BD354-A531-0EC8-67BA-AD338185504A}"/>
+                    </a:ext>
+                  </a:extLst>
+                </p14:cNvPr>
+                <p14:cNvContentPartPr/>
+                <p14:nvPr/>
+              </p14:nvContentPartPr>
+              <p14:xfrm>
+                <a:off x="6497424" y="2652696"/>
+                <a:ext cx="172800" cy="541440"/>
+              </p14:xfrm>
+            </p:contentPart>
+          </mc:Choice>
+          <mc:Fallback xmlns="">
+            <p:pic>
+              <p:nvPicPr>
+                <p:cNvPr id="33" name="Ink 32">
+                  <a:extLst>
+                    <a:ext uri="{FF2B5EF4-FFF2-40B4-BE49-F238E27FC236}">
+                      <a16:creationId xmlns:a16="http://schemas.microsoft.com/office/drawing/2014/main" id="{F70BD354-A531-0EC8-67BA-AD338185504A}"/>
+                    </a:ext>
+                  </a:extLst>
+                </p:cNvPr>
+                <p:cNvPicPr/>
+                <p:nvPr/>
+              </p:nvPicPr>
+              <p:blipFill>
+                <a:blip r:embed="rId23"/>
+                <a:stretch>
+                  <a:fillRect/>
+                </a:stretch>
+              </p:blipFill>
+              <p:spPr>
+                <a:xfrm>
+                  <a:off x="6479424" y="2634696"/>
+                  <a:ext cx="208440" cy="577080"/>
+                </a:xfrm>
+                <a:prstGeom prst="rect">
+                  <a:avLst/>
+                </a:prstGeom>
+              </p:spPr>
+            </p:pic>
+          </mc:Fallback>
+        </mc:AlternateContent>
+        <mc:AlternateContent xmlns:mc="http://schemas.openxmlformats.org/markup-compatibility/2006" xmlns:p14="http://schemas.microsoft.com/office/powerpoint/2010/main">
+          <mc:Choice Requires="p14">
+            <p:contentPart p14:bwMode="auto" r:id="rId24">
+              <p14:nvContentPartPr>
+                <p14:cNvPr id="34" name="Ink 33">
+                  <a:extLst>
+                    <a:ext uri="{FF2B5EF4-FFF2-40B4-BE49-F238E27FC236}">
+                      <a16:creationId xmlns:a16="http://schemas.microsoft.com/office/drawing/2014/main" id="{7966B1D6-36F5-2747-7C6A-DF5EFA3339E1}"/>
+                    </a:ext>
+                  </a:extLst>
+                </p14:cNvPr>
+                <p14:cNvContentPartPr/>
+                <p14:nvPr/>
+              </p14:nvContentPartPr>
+              <p14:xfrm>
+                <a:off x="6452784" y="3004416"/>
+                <a:ext cx="230760" cy="166680"/>
+              </p14:xfrm>
+            </p:contentPart>
+          </mc:Choice>
+          <mc:Fallback xmlns="">
+            <p:pic>
+              <p:nvPicPr>
+                <p:cNvPr id="34" name="Ink 33">
+                  <a:extLst>
+                    <a:ext uri="{FF2B5EF4-FFF2-40B4-BE49-F238E27FC236}">
+                      <a16:creationId xmlns:a16="http://schemas.microsoft.com/office/drawing/2014/main" id="{7966B1D6-36F5-2747-7C6A-DF5EFA3339E1}"/>
+                    </a:ext>
+                  </a:extLst>
+                </p:cNvPr>
+                <p:cNvPicPr/>
+                <p:nvPr/>
+              </p:nvPicPr>
+              <p:blipFill>
+                <a:blip r:embed="rId25"/>
+                <a:stretch>
+                  <a:fillRect/>
+                </a:stretch>
+              </p:blipFill>
+              <p:spPr>
+                <a:xfrm>
+                  <a:off x="6434784" y="2986776"/>
+                  <a:ext cx="266400" cy="202320"/>
+                </a:xfrm>
+                <a:prstGeom prst="rect">
+                  <a:avLst/>
+                </a:prstGeom>
+              </p:spPr>
+            </p:pic>
+          </mc:Fallback>
+        </mc:AlternateContent>
+        <mc:AlternateContent xmlns:mc="http://schemas.openxmlformats.org/markup-compatibility/2006" xmlns:p14="http://schemas.microsoft.com/office/powerpoint/2010/main">
+          <mc:Choice Requires="p14">
+            <p:contentPart p14:bwMode="auto" r:id="rId26">
+              <p14:nvContentPartPr>
+                <p14:cNvPr id="39" name="Ink 38">
+                  <a:extLst>
+                    <a:ext uri="{FF2B5EF4-FFF2-40B4-BE49-F238E27FC236}">
+                      <a16:creationId xmlns:a16="http://schemas.microsoft.com/office/drawing/2014/main" id="{F3A2A4B5-ACC9-ACCA-EF25-C0A266247ABA}"/>
+                    </a:ext>
+                  </a:extLst>
+                </p14:cNvPr>
+                <p14:cNvContentPartPr/>
+                <p14:nvPr/>
+              </p14:nvContentPartPr>
+              <p14:xfrm>
+                <a:off x="5813784" y="2683656"/>
+                <a:ext cx="263880" cy="324000"/>
+              </p14:xfrm>
+            </p:contentPart>
+          </mc:Choice>
+          <mc:Fallback xmlns="">
+            <p:pic>
+              <p:nvPicPr>
+                <p:cNvPr id="39" name="Ink 38">
+                  <a:extLst>
+                    <a:ext uri="{FF2B5EF4-FFF2-40B4-BE49-F238E27FC236}">
+                      <a16:creationId xmlns:a16="http://schemas.microsoft.com/office/drawing/2014/main" id="{F3A2A4B5-ACC9-ACCA-EF25-C0A266247ABA}"/>
+                    </a:ext>
+                  </a:extLst>
+                </p:cNvPr>
+                <p:cNvPicPr/>
+                <p:nvPr/>
+              </p:nvPicPr>
+              <p:blipFill>
+                <a:blip r:embed="rId27"/>
+                <a:stretch>
+                  <a:fillRect/>
+                </a:stretch>
+              </p:blipFill>
+              <p:spPr>
+                <a:xfrm>
+                  <a:off x="5795784" y="2665656"/>
+                  <a:ext cx="299520" cy="359640"/>
+                </a:xfrm>
+                <a:prstGeom prst="rect">
+                  <a:avLst/>
+                </a:prstGeom>
+              </p:spPr>
+            </p:pic>
+          </mc:Fallback>
+        </mc:AlternateContent>
+        <mc:AlternateContent xmlns:mc="http://schemas.openxmlformats.org/markup-compatibility/2006" xmlns:p14="http://schemas.microsoft.com/office/powerpoint/2010/main">
+          <mc:Choice Requires="p14">
+            <p:contentPart p14:bwMode="auto" r:id="rId28">
+              <p14:nvContentPartPr>
+                <p14:cNvPr id="40" name="Ink 39">
+                  <a:extLst>
+                    <a:ext uri="{FF2B5EF4-FFF2-40B4-BE49-F238E27FC236}">
+                      <a16:creationId xmlns:a16="http://schemas.microsoft.com/office/drawing/2014/main" id="{4F861C5B-3359-EEC7-CA7B-30CDDDB84FD1}"/>
+                    </a:ext>
+                  </a:extLst>
+                </p14:cNvPr>
+                <p14:cNvContentPartPr/>
+                <p14:nvPr/>
+              </p14:nvContentPartPr>
+              <p14:xfrm>
+                <a:off x="6011784" y="2865816"/>
+                <a:ext cx="128160" cy="89280"/>
+              </p14:xfrm>
+            </p:contentPart>
+          </mc:Choice>
+          <mc:Fallback xmlns="">
+            <p:pic>
+              <p:nvPicPr>
+                <p:cNvPr id="40" name="Ink 39">
+                  <a:extLst>
+                    <a:ext uri="{FF2B5EF4-FFF2-40B4-BE49-F238E27FC236}">
+                      <a16:creationId xmlns:a16="http://schemas.microsoft.com/office/drawing/2014/main" id="{4F861C5B-3359-EEC7-CA7B-30CDDDB84FD1}"/>
+                    </a:ext>
+                  </a:extLst>
+                </p:cNvPr>
+                <p:cNvPicPr/>
+                <p:nvPr/>
+              </p:nvPicPr>
+              <p:blipFill>
+                <a:blip r:embed="rId29"/>
+                <a:stretch>
+                  <a:fillRect/>
+                </a:stretch>
+              </p:blipFill>
+              <p:spPr>
+                <a:xfrm>
+                  <a:off x="5994144" y="2848176"/>
+                  <a:ext cx="163800" cy="124920"/>
+                </a:xfrm>
+                <a:prstGeom prst="rect">
+                  <a:avLst/>
+                </a:prstGeom>
+              </p:spPr>
+            </p:pic>
+          </mc:Fallback>
+        </mc:AlternateContent>
+        <mc:AlternateContent xmlns:mc="http://schemas.openxmlformats.org/markup-compatibility/2006" xmlns:p14="http://schemas.microsoft.com/office/powerpoint/2010/main">
+          <mc:Choice Requires="p14">
+            <p:contentPart p14:bwMode="auto" r:id="rId30">
+              <p14:nvContentPartPr>
+                <p14:cNvPr id="41" name="Ink 40">
+                  <a:extLst>
+                    <a:ext uri="{FF2B5EF4-FFF2-40B4-BE49-F238E27FC236}">
+                      <a16:creationId xmlns:a16="http://schemas.microsoft.com/office/drawing/2014/main" id="{4C6B019E-349A-840E-2CA1-6C5881070D34}"/>
+                    </a:ext>
+                  </a:extLst>
+                </p14:cNvPr>
+                <p14:cNvContentPartPr/>
+                <p14:nvPr/>
+              </p14:nvContentPartPr>
+              <p14:xfrm>
+                <a:off x="6146784" y="2836656"/>
+                <a:ext cx="142920" cy="112320"/>
+              </p14:xfrm>
+            </p:contentPart>
+          </mc:Choice>
+          <mc:Fallback xmlns="">
+            <p:pic>
+              <p:nvPicPr>
+                <p:cNvPr id="41" name="Ink 40">
+                  <a:extLst>
+                    <a:ext uri="{FF2B5EF4-FFF2-40B4-BE49-F238E27FC236}">
+                      <a16:creationId xmlns:a16="http://schemas.microsoft.com/office/drawing/2014/main" id="{4C6B019E-349A-840E-2CA1-6C5881070D34}"/>
+                    </a:ext>
+                  </a:extLst>
+                </p:cNvPr>
+                <p:cNvPicPr/>
+                <p:nvPr/>
+              </p:nvPicPr>
+              <p:blipFill>
+                <a:blip r:embed="rId31"/>
+                <a:stretch>
+                  <a:fillRect/>
+                </a:stretch>
+              </p:blipFill>
+              <p:spPr>
+                <a:xfrm>
+                  <a:off x="6128784" y="2818656"/>
+                  <a:ext cx="178560" cy="147960"/>
+                </a:xfrm>
+                <a:prstGeom prst="rect">
+                  <a:avLst/>
+                </a:prstGeom>
+              </p:spPr>
+            </p:pic>
+          </mc:Fallback>
+        </mc:AlternateContent>
+      </p:grpSp>
+      <p:grpSp>
+        <p:nvGrpSpPr>
+          <p:cNvPr id="45" name="Group 44">
+            <a:extLst>
+              <a:ext uri="{FF2B5EF4-FFF2-40B4-BE49-F238E27FC236}">
+                <a16:creationId xmlns:a16="http://schemas.microsoft.com/office/drawing/2014/main" id="{C3B2B95E-F39A-40C5-5D79-6821168CAA48}"/>
+              </a:ext>
+            </a:extLst>
+          </p:cNvPr>
+          <p:cNvGrpSpPr/>
+          <p:nvPr/>
+        </p:nvGrpSpPr>
+        <p:grpSpPr>
+          <a:xfrm>
+            <a:off x="7249464" y="2556576"/>
+            <a:ext cx="973080" cy="636480"/>
+            <a:chOff x="7249464" y="2556576"/>
+            <a:chExt cx="973080" cy="636480"/>
+          </a:xfrm>
+        </p:grpSpPr>
+        <mc:AlternateContent xmlns:mc="http://schemas.openxmlformats.org/markup-compatibility/2006" xmlns:p14="http://schemas.microsoft.com/office/powerpoint/2010/main">
+          <mc:Choice Requires="p14">
+            <p:contentPart p14:bwMode="auto" r:id="rId32">
+              <p14:nvContentPartPr>
+                <p14:cNvPr id="35" name="Ink 34">
+                  <a:extLst>
+                    <a:ext uri="{FF2B5EF4-FFF2-40B4-BE49-F238E27FC236}">
+                      <a16:creationId xmlns:a16="http://schemas.microsoft.com/office/drawing/2014/main" id="{A2562187-675F-638C-5EC0-2B31C97E8449}"/>
+                    </a:ext>
+                  </a:extLst>
+                </p14:cNvPr>
+                <p14:cNvContentPartPr/>
+                <p14:nvPr/>
+              </p14:nvContentPartPr>
+              <p14:xfrm>
+                <a:off x="7249464" y="2556576"/>
+                <a:ext cx="798480" cy="608400"/>
+              </p14:xfrm>
+            </p:contentPart>
+          </mc:Choice>
+          <mc:Fallback xmlns="">
+            <p:pic>
+              <p:nvPicPr>
+                <p:cNvPr id="35" name="Ink 34">
+                  <a:extLst>
+                    <a:ext uri="{FF2B5EF4-FFF2-40B4-BE49-F238E27FC236}">
+                      <a16:creationId xmlns:a16="http://schemas.microsoft.com/office/drawing/2014/main" id="{A2562187-675F-638C-5EC0-2B31C97E8449}"/>
+                    </a:ext>
+                  </a:extLst>
+                </p:cNvPr>
+                <p:cNvPicPr/>
+                <p:nvPr/>
+              </p:nvPicPr>
+              <p:blipFill>
+                <a:blip r:embed="rId33"/>
+                <a:stretch>
+                  <a:fillRect/>
+                </a:stretch>
+              </p:blipFill>
+              <p:spPr>
+                <a:xfrm>
+                  <a:off x="7231464" y="2538576"/>
+                  <a:ext cx="834120" cy="644040"/>
+                </a:xfrm>
+                <a:prstGeom prst="rect">
+                  <a:avLst/>
+                </a:prstGeom>
+              </p:spPr>
+            </p:pic>
+          </mc:Fallback>
+        </mc:AlternateContent>
+        <mc:AlternateContent xmlns:mc="http://schemas.openxmlformats.org/markup-compatibility/2006" xmlns:p14="http://schemas.microsoft.com/office/powerpoint/2010/main">
+          <mc:Choice Requires="p14">
+            <p:contentPart p14:bwMode="auto" r:id="rId34">
+              <p14:nvContentPartPr>
+                <p14:cNvPr id="36" name="Ink 35">
+                  <a:extLst>
+                    <a:ext uri="{FF2B5EF4-FFF2-40B4-BE49-F238E27FC236}">
+                      <a16:creationId xmlns:a16="http://schemas.microsoft.com/office/drawing/2014/main" id="{7280E87A-15BA-E290-43A7-2FB6B218E495}"/>
+                    </a:ext>
+                  </a:extLst>
+                </p14:cNvPr>
+                <p14:cNvContentPartPr/>
+                <p14:nvPr/>
+              </p14:nvContentPartPr>
+              <p14:xfrm>
+                <a:off x="7749144" y="2977416"/>
+                <a:ext cx="285120" cy="215640"/>
+              </p14:xfrm>
+            </p:contentPart>
+          </mc:Choice>
+          <mc:Fallback xmlns="">
+            <p:pic>
+              <p:nvPicPr>
+                <p:cNvPr id="36" name="Ink 35">
+                  <a:extLst>
+                    <a:ext uri="{FF2B5EF4-FFF2-40B4-BE49-F238E27FC236}">
+                      <a16:creationId xmlns:a16="http://schemas.microsoft.com/office/drawing/2014/main" id="{7280E87A-15BA-E290-43A7-2FB6B218E495}"/>
+                    </a:ext>
+                  </a:extLst>
+                </p:cNvPr>
+                <p:cNvPicPr/>
+                <p:nvPr/>
+              </p:nvPicPr>
+              <p:blipFill>
+                <a:blip r:embed="rId35"/>
+                <a:stretch>
+                  <a:fillRect/>
+                </a:stretch>
+              </p:blipFill>
+              <p:spPr>
+                <a:xfrm>
+                  <a:off x="7731504" y="2959776"/>
+                  <a:ext cx="320760" cy="251280"/>
+                </a:xfrm>
+                <a:prstGeom prst="rect">
+                  <a:avLst/>
+                </a:prstGeom>
+              </p:spPr>
+            </p:pic>
+          </mc:Fallback>
+        </mc:AlternateContent>
+        <mc:AlternateContent xmlns:mc="http://schemas.openxmlformats.org/markup-compatibility/2006" xmlns:p14="http://schemas.microsoft.com/office/powerpoint/2010/main">
+          <mc:Choice Requires="p14">
+            <p:contentPart p14:bwMode="auto" r:id="rId36">
+              <p14:nvContentPartPr>
+                <p14:cNvPr id="43" name="Ink 42">
+                  <a:extLst>
+                    <a:ext uri="{FF2B5EF4-FFF2-40B4-BE49-F238E27FC236}">
+                      <a16:creationId xmlns:a16="http://schemas.microsoft.com/office/drawing/2014/main" id="{F4645E99-1224-86CE-B92C-D1E406AAE1A0}"/>
+                    </a:ext>
+                  </a:extLst>
+                </p14:cNvPr>
+                <p14:cNvContentPartPr/>
+                <p14:nvPr/>
+              </p14:nvContentPartPr>
+              <p14:xfrm>
+                <a:off x="7815384" y="2678256"/>
+                <a:ext cx="232200" cy="155160"/>
+              </p14:xfrm>
+            </p:contentPart>
+          </mc:Choice>
+          <mc:Fallback xmlns="">
+            <p:pic>
+              <p:nvPicPr>
+                <p:cNvPr id="43" name="Ink 42">
+                  <a:extLst>
+                    <a:ext uri="{FF2B5EF4-FFF2-40B4-BE49-F238E27FC236}">
+                      <a16:creationId xmlns:a16="http://schemas.microsoft.com/office/drawing/2014/main" id="{F4645E99-1224-86CE-B92C-D1E406AAE1A0}"/>
+                    </a:ext>
+                  </a:extLst>
+                </p:cNvPr>
+                <p:cNvPicPr/>
+                <p:nvPr/>
+              </p:nvPicPr>
+              <p:blipFill>
+                <a:blip r:embed="rId37"/>
+                <a:stretch>
+                  <a:fillRect/>
+                </a:stretch>
+              </p:blipFill>
+              <p:spPr>
+                <a:xfrm>
+                  <a:off x="7797744" y="2660616"/>
+                  <a:ext cx="267840" cy="190800"/>
+                </a:xfrm>
+                <a:prstGeom prst="rect">
+                  <a:avLst/>
+                </a:prstGeom>
+              </p:spPr>
+            </p:pic>
+          </mc:Fallback>
+        </mc:AlternateContent>
+        <mc:AlternateContent xmlns:mc="http://schemas.openxmlformats.org/markup-compatibility/2006" xmlns:p14="http://schemas.microsoft.com/office/powerpoint/2010/main">
+          <mc:Choice Requires="p14">
+            <p:contentPart p14:bwMode="auto" r:id="rId38">
+              <p14:nvContentPartPr>
+                <p14:cNvPr id="44" name="Ink 43">
+                  <a:extLst>
+                    <a:ext uri="{FF2B5EF4-FFF2-40B4-BE49-F238E27FC236}">
+                      <a16:creationId xmlns:a16="http://schemas.microsoft.com/office/drawing/2014/main" id="{C81FD850-9249-463C-2F03-D84B07C20461}"/>
+                    </a:ext>
+                  </a:extLst>
+                </p14:cNvPr>
+                <p14:cNvContentPartPr/>
+                <p14:nvPr/>
+              </p14:nvContentPartPr>
+              <p14:xfrm>
+                <a:off x="8112024" y="2761056"/>
+                <a:ext cx="110520" cy="65880"/>
+              </p14:xfrm>
+            </p:contentPart>
+          </mc:Choice>
+          <mc:Fallback xmlns="">
+            <p:pic>
+              <p:nvPicPr>
+                <p:cNvPr id="44" name="Ink 43">
+                  <a:extLst>
+                    <a:ext uri="{FF2B5EF4-FFF2-40B4-BE49-F238E27FC236}">
+                      <a16:creationId xmlns:a16="http://schemas.microsoft.com/office/drawing/2014/main" id="{C81FD850-9249-463C-2F03-D84B07C20461}"/>
+                    </a:ext>
+                  </a:extLst>
+                </p:cNvPr>
+                <p:cNvPicPr/>
+                <p:nvPr/>
+              </p:nvPicPr>
+              <p:blipFill>
+                <a:blip r:embed="rId39"/>
+                <a:stretch>
+                  <a:fillRect/>
+                </a:stretch>
+              </p:blipFill>
+              <p:spPr>
+                <a:xfrm>
+                  <a:off x="8094024" y="2743056"/>
+                  <a:ext cx="146160" cy="101520"/>
+                </a:xfrm>
+                <a:prstGeom prst="rect">
+                  <a:avLst/>
+                </a:prstGeom>
+              </p:spPr>
+            </p:pic>
+          </mc:Fallback>
+        </mc:AlternateContent>
+      </p:grpSp>
+      <p:sp>
+        <p:nvSpPr>
+          <p:cNvPr id="46" name="TextBox 45">
+            <a:extLst>
+              <a:ext uri="{FF2B5EF4-FFF2-40B4-BE49-F238E27FC236}">
+                <a16:creationId xmlns:a16="http://schemas.microsoft.com/office/drawing/2014/main" id="{A011C16F-4443-E81B-7859-1C708CF44002}"/>
+              </a:ext>
+            </a:extLst>
+          </p:cNvPr>
+          <p:cNvSpPr txBox="1"/>
+          <p:nvPr/>
+        </p:nvSpPr>
+        <p:spPr>
+          <a:xfrm>
+            <a:off x="776917" y="266658"/>
+            <a:ext cx="2741713" cy="461665"/>
+          </a:xfrm>
+          <a:prstGeom prst="rect">
+            <a:avLst/>
+          </a:prstGeom>
+          <a:noFill/>
+        </p:spPr>
+        <p:txBody>
+          <a:bodyPr wrap="none" rtlCol="0">
+            <a:spAutoFit/>
+          </a:bodyPr>
+          <a:lstStyle/>
+          <a:p>
+            <a:r>
+              <a:rPr lang="en-US" sz="2400" dirty="0">
+                <a:solidFill>
+                  <a:schemeClr val="accent6">
+                    <a:lumMod val="60000"/>
+                    <a:lumOff val="40000"/>
+                  </a:schemeClr>
+                </a:solidFill>
+              </a:rPr>
+              <a:t>Is a person healthy ?</a:t>
+            </a:r>
+          </a:p>
+        </p:txBody>
+      </p:sp>
     </p:spTree>
     <p:extLst>
       <p:ext uri="{BB962C8B-B14F-4D97-AF65-F5344CB8AC3E}">
-        <p14:creationId xmlns:p14="http://schemas.microsoft.com/office/powerpoint/2010/main" val="2306991871"/>
+        <p14:creationId xmlns:p14="http://schemas.microsoft.com/office/powerpoint/2010/main" val="3368184449"/>
       </p:ext>
     </p:extLst>
   </p:cSld>
@@ -8422,7 +10230,7 @@
                   </a:schemeClr>
                 </a:solidFill>
               </a:rPr>
-              <a:t>Input (facts): P</a:t>
+              <a:t>Input (facts): Patient has fever </a:t>
             </a:r>
             <a:r>
               <a:rPr lang="en-US" sz="2400" dirty="0">
@@ -8433,7 +10241,18 @@
                   </a:schemeClr>
                 </a:solidFill>
               </a:rPr>
-              <a:t>atient has fever and Patient has cough.</a:t>
+              <a:t>and </a:t>
+            </a:r>
+            <a:r>
+              <a:rPr lang="en-US" sz="2400" b="1" dirty="0">
+                <a:solidFill>
+                  <a:schemeClr val="accent6">
+                    <a:lumMod val="60000"/>
+                    <a:lumOff val="40000"/>
+                  </a:schemeClr>
+                </a:solidFill>
+              </a:rPr>
+              <a:t>Patient has cough.</a:t>
             </a:r>
           </a:p>
           <a:p>
@@ -8456,7 +10275,7 @@
                   </a:schemeClr>
                 </a:solidFill>
               </a:rPr>
-              <a:t>Rule 1 matches → conclusion: "Patient might have flu."</a:t>
+              <a:t>Rule 1 matches → Conclusion: "Patient might have flu."</a:t>
             </a:r>
           </a:p>
         </p:txBody>
